--- a/docs/Koroglu-Epic-Game.pptx
+++ b/docs/Koroglu-Epic-Game.pptx
@@ -2162,7 +2162,7 @@
                 <a:ea typeface="Georgia" pitchFamily="34" charset="-122"/>
                 <a:cs typeface="Georgia" pitchFamily="34" charset="-120"/>
               </a:rPr>
-              <a:t>The problem</a:t>
+              <a:t>The user and the problem</a:t>
             </a:r>
             <a:endParaRPr lang="en-US" sz="3600" dirty="0"/>
           </a:p>
@@ -2201,7 +2201,7 @@
                 <a:ea typeface="Georgia" pitchFamily="34" charset="-122"/>
                 <a:cs typeface="Georgia" pitchFamily="34" charset="-120"/>
               </a:rPr>
-              <a:t>Cultural epics stay distant when they stay passive</a:t>
+              <a:t>Who this is for — and what goes wrong for them today. Not “everyone.”</a:t>
             </a:r>
             <a:endParaRPr lang="en-US" sz="1800" dirty="0"/>
           </a:p>
@@ -2244,70 +2244,70 @@
                 <a:ea typeface="Georgia" pitchFamily="34" charset="-122"/>
                 <a:cs typeface="Georgia" pitchFamily="34" charset="-120"/>
               </a:rPr>
-              <a:t>Koroglu is still taught as text, lecture, or a name on a slide</a:t>
-            </a:r>
-            <a:endParaRPr lang="en-US" sz="2000" dirty="0"/>
-          </a:p>
-          <a:p>
-            <a:pPr marL="342900" indent="-342900">
-              <a:spcAft>
-                <a:spcPts val="1000"/>
-              </a:spcAft>
-              <a:buSzPct val="100000"/>
-              <a:buChar char="•"/>
-            </a:pPr>
-            <a:r>
-              <a:rPr lang="en-US" sz="2000" dirty="0">
-                <a:solidFill>
-                  <a:srgbClr val="F4E6C1"/>
-                </a:solidFill>
-                <a:latin typeface="Georgia" pitchFamily="34" charset="0"/>
-                <a:ea typeface="Georgia" pitchFamily="34" charset="-122"/>
-                <a:cs typeface="Georgia" pitchFamily="34" charset="-120"/>
-              </a:rPr>
-              <a:t>Listeners do not do the moral choice, the mounted fight, or the ashik’s verse</a:t>
-            </a:r>
-            <a:endParaRPr lang="en-US" sz="2000" dirty="0"/>
-          </a:p>
-          <a:p>
-            <a:pPr marL="342900" indent="-342900">
-              <a:spcAft>
-                <a:spcPts val="1000"/>
-              </a:spcAft>
-              <a:buSzPct val="100000"/>
-              <a:buChar char="•"/>
-            </a:pPr>
-            <a:r>
-              <a:rPr lang="en-US" sz="2000" dirty="0">
-                <a:solidFill>
-                  <a:srgbClr val="F4E6C1"/>
-                </a:solidFill>
-                <a:latin typeface="Georgia" pitchFamily="34" charset="0"/>
-                <a:ea typeface="Georgia" pitchFamily="34" charset="-122"/>
-                <a:cs typeface="Georgia" pitchFamily="34" charset="-120"/>
-              </a:rPr>
-              <a:t>Young people will not sit through a long recitation</a:t>
-            </a:r>
-            <a:endParaRPr lang="en-US" sz="2000" dirty="0"/>
-          </a:p>
-          <a:p>
-            <a:pPr marL="342900" indent="-342900">
-              <a:spcAft>
-                <a:spcPts val="1000"/>
-              </a:spcAft>
-              <a:buSzPct val="100000"/>
-              <a:buChar char="•"/>
-            </a:pPr>
-            <a:r>
-              <a:rPr lang="en-US" sz="2000" dirty="0">
-                <a:solidFill>
-                  <a:srgbClr val="F4E6C1"/>
-                </a:solidFill>
-                <a:latin typeface="Georgia" pitchFamily="34" charset="0"/>
-                <a:ea typeface="Georgia" pitchFamily="34" charset="-122"/>
-                <a:cs typeface="Georgia" pitchFamily="34" charset="-120"/>
-              </a:rPr>
-              <a:t>Educators need a short, playable proof of the tale’s ethics</a:t>
+              <a:t>A 15–18-year-old in an Azerbaijani / Turkish / Turkmen class or diaspora school: they know the name from a statue or exam. Today they get recitation or Wikipedia — they never ride, never choose, they close the tab.</a:t>
+            </a:r>
+            <a:endParaRPr lang="en-US" sz="2000" dirty="0"/>
+          </a:p>
+          <a:p>
+            <a:pPr marL="342900" indent="-342900">
+              <a:spcAft>
+                <a:spcPts val="1000"/>
+              </a:spcAft>
+              <a:buSzPct val="100000"/>
+              <a:buChar char="•"/>
+            </a:pPr>
+            <a:r>
+              <a:rPr lang="en-US" sz="2000" dirty="0">
+                <a:solidFill>
+                  <a:srgbClr val="F4E6C1"/>
+                </a:solidFill>
+                <a:latin typeface="Georgia" pitchFamily="34" charset="0"/>
+                <a:ea typeface="Georgia" pitchFamily="34" charset="-122"/>
+                <a:cs typeface="Georgia" pitchFamily="34" charset="-120"/>
+              </a:rPr>
+              <a:t>A heritage teacher with one short period: they cannot assign a 400-page dastan. Today they show a slide titled “Epic of Koroglu” and hope a summary sticks. They have no 2-minute thing a student can play.</a:t>
+            </a:r>
+            <a:endParaRPr lang="en-US" sz="2000" dirty="0"/>
+          </a:p>
+          <a:p>
+            <a:pPr marL="342900" indent="-342900">
+              <a:spcAft>
+                <a:spcPts val="1000"/>
+              </a:spcAft>
+              <a:buSzPct val="100000"/>
+              <a:buChar char="•"/>
+            </a:pPr>
+            <a:r>
+              <a:rPr lang="en-US" sz="2000" dirty="0">
+                <a:solidFill>
+                  <a:srgbClr val="F4E6C1"/>
+                </a:solidFill>
+                <a:latin typeface="Georgia" pitchFamily="34" charset="0"/>
+                <a:ea typeface="Georgia" pitchFamily="34" charset="-122"/>
+                <a:cs typeface="Georgia" pitchFamily="34" charset="-120"/>
+              </a:rPr>
+              <a:t>A young gamer who already spends an hour on horses and swords: that hour goes to a made-up kingdom. Their own oral epic sits unused next to the habit that could carry it.</a:t>
+            </a:r>
+            <a:endParaRPr lang="en-US" sz="2000" dirty="0"/>
+          </a:p>
+          <a:p>
+            <a:pPr marL="342900" indent="-342900">
+              <a:spcAft>
+                <a:spcPts val="1000"/>
+              </a:spcAft>
+              <a:buSzPct val="100000"/>
+              <a:buChar char="•"/>
+            </a:pPr>
+            <a:r>
+              <a:rPr lang="en-US" sz="2000" dirty="0">
+                <a:solidFill>
+                  <a:srgbClr val="F4E6C1"/>
+                </a:solidFill>
+                <a:latin typeface="Georgia" pitchFamily="34" charset="0"/>
+                <a:ea typeface="Georgia" pitchFamily="34" charset="-122"/>
+                <a:cs typeface="Georgia" pitchFamily="34" charset="-120"/>
+              </a:rPr>
+              <a:t>The encyclopedia already exists. What fails is practice: no mounted choice, no verse as courage, no moral fork they can get wrong.</a:t>
             </a:r>
             <a:endParaRPr lang="en-US" sz="2000" dirty="0"/>
           </a:p>

--- a/docs/Koroglu-Epic-Game.pptx
+++ b/docs/Koroglu-Epic-Game.pptx
@@ -15,9 +15,10 @@
     <p:sldId id="263" r:id="rId9"/>
     <p:sldId id="264" r:id="rId10"/>
     <p:sldId id="265" r:id="rId11"/>
+    <p:sldId id="266" r:id="rId12"/>
   </p:sldIdLst>
   <p:notesMasterIdLst>
-    <p:notesMasterId r:id="rId12"/>
+    <p:notesMasterId r:id="rId13"/>
   </p:notesMasterIdLst>
   <p:sldSz cx="12191695" cy="6858000"/>
   <p:notesSz cx="6858000" cy="12191695"/>
@@ -623,6 +624,94 @@
             <a:fld id="{F7021451-1387-4CA6-816F-3879F97B5CBC}" type="slidenum">
               <a:rPr lang="en-US"/>
               <a:t>10</a:t>
+            </a:fld>
+            <a:endParaRPr lang="en-US"/>
+          </a:p>
+        </p:txBody>
+      </p:sp>
+    </p:spTree>
+    <p:extLst>
+      <p:ext uri="{BB962C8B-B14F-4D97-AF65-F5344CB8AC3E}">
+        <p14:creationId xmlns:p14="http://schemas.microsoft.com/office/powerpoint/2010/main" val="1024086991"/>
+      </p:ext>
+    </p:extLst>
+  </p:cSld>
+  <p:clrMapOvr>
+    <a:masterClrMapping/>
+  </p:clrMapOvr>
+</p:notes>
+</file>
+
+<file path=ppt/notesSlides/notesSlide11.xml><?xml version="1.0" encoding="utf-8"?>
+<p:notes xmlns:a="http://schemas.openxmlformats.org/drawingml/2006/main" xmlns:r="http://schemas.openxmlformats.org/officeDocument/2006/relationships" xmlns:p="http://schemas.openxmlformats.org/presentationml/2006/main">
+  <p:cSld>
+    <p:spTree>
+      <p:nvGrpSpPr>
+        <p:cNvPr id="1" name=""/>
+        <p:cNvGrpSpPr/>
+        <p:nvPr/>
+      </p:nvGrpSpPr>
+      <p:grpSpPr>
+        <a:xfrm>
+          <a:off x="0" y="0"/>
+          <a:ext cx="0" cy="0"/>
+          <a:chOff x="0" y="0"/>
+          <a:chExt cx="0" cy="0"/>
+        </a:xfrm>
+      </p:grpSpPr>
+      <p:sp>
+        <p:nvSpPr>
+          <p:cNvPr id="2" name="Slide Image Placeholder 1"/>
+          <p:cNvSpPr>
+            <a:spLocks noGrp="1" noRot="1" noChangeAspect="1"/>
+          </p:cNvSpPr>
+          <p:nvPr>
+            <p:ph type="sldImg"/>
+          </p:nvPr>
+        </p:nvSpPr>
+        <p:spPr/>
+      </p:sp>
+      <p:sp>
+        <p:nvSpPr>
+          <p:cNvPr id="3" name="Notes Placeholder 2"/>
+          <p:cNvSpPr>
+            <a:spLocks noGrp="1"/>
+          </p:cNvSpPr>
+          <p:nvPr>
+            <p:ph type="body" idx="1"/>
+          </p:nvPr>
+        </p:nvSpPr>
+        <p:spPr/>
+        <p:txBody>
+          <a:bodyPr/>
+          <a:lstStyle/>
+          <a:p>
+            <a:r>
+              <a:rPr lang="en-US" dirty="0"/>
+              <a:t/>
+            </a:r>
+            <a:endParaRPr lang="en-US" dirty="0"/>
+          </a:p>
+        </p:txBody>
+      </p:sp>
+      <p:sp>
+        <p:nvSpPr>
+          <p:cNvPr id="4" name="Slide Number Placeholder 3"/>
+          <p:cNvSpPr>
+            <a:spLocks noGrp="1"/>
+          </p:cNvSpPr>
+          <p:nvPr>
+            <p:ph type="sldNum" sz="quarter" idx="10"/>
+          </p:nvPr>
+        </p:nvSpPr>
+        <p:spPr/>
+        <p:txBody>
+          <a:bodyPr/>
+          <a:lstStyle/>
+          <a:p>
+            <a:fld id="{F7021451-1387-4CA6-816F-3879F97B5CBC}" type="slidenum">
+              <a:rPr lang="en-US"/>
+              <a:t>11</a:t>
             </a:fld>
             <a:endParaRPr lang="en-US"/>
           </a:p>
@@ -1684,8 +1773,8 @@
         </p:nvSpPr>
         <p:spPr>
           <a:xfrm>
-            <a:off x="548640" y="256032"/>
-            <a:ext cx="11064240" cy="777240"/>
+            <a:off x="548640" y="1051560"/>
+            <a:ext cx="6949440" cy="868680"/>
           </a:xfrm>
           <a:prstGeom prst="rect">
             <a:avLst/>
@@ -1701,7 +1790,7 @@
               <a:buNone/>
             </a:pPr>
             <a:r>
-              <a:rPr lang="en-US" sz="3600" b="1" dirty="0">
+              <a:rPr lang="en-US" sz="4800" b="1" dirty="0">
                 <a:solidFill>
                   <a:srgbClr val="E8C64A"/>
                 </a:solidFill>
@@ -1709,9 +1798,9 @@
                 <a:ea typeface="Georgia" pitchFamily="34" charset="-122"/>
                 <a:cs typeface="Georgia" pitchFamily="34" charset="-120"/>
               </a:rPr>
-              <a:t>Epic of Koroglu</a:t>
-            </a:r>
-            <a:endParaRPr lang="en-US" sz="3600" dirty="0"/>
+              <a:t>Koroğlu</a:t>
+            </a:r>
+            <a:endParaRPr lang="en-US" sz="4800" dirty="0"/>
           </a:p>
         </p:txBody>
       </p:sp>
@@ -1723,8 +1812,8 @@
         </p:nvSpPr>
         <p:spPr>
           <a:xfrm>
-            <a:off x="548640" y="1024128"/>
-            <a:ext cx="11064240" cy="457200"/>
+            <a:off x="548640" y="1920240"/>
+            <a:ext cx="6949440" cy="365760"/>
           </a:xfrm>
           <a:prstGeom prst="rect">
             <a:avLst/>
@@ -1740,7 +1829,7 @@
               <a:buNone/>
             </a:pPr>
             <a:r>
-              <a:rPr lang="en-US" sz="1800" i="1" dirty="0">
+              <a:rPr lang="en-US" sz="1600" i="1" dirty="0">
                 <a:solidFill>
                   <a:srgbClr val="C9A227"/>
                 </a:solidFill>
@@ -1748,9 +1837,9 @@
                 <a:ea typeface="Georgia" pitchFamily="34" charset="-122"/>
                 <a:cs typeface="Georgia" pitchFamily="34" charset="-120"/>
               </a:rPr>
-              <a:t>A playable Three.js dastan — not a lecture</a:t>
-            </a:r>
-            <a:endParaRPr lang="en-US" sz="1800" dirty="0"/>
+              <a:t>Group name  ·  Project name</a:t>
+            </a:r>
+            <a:endParaRPr lang="en-US" sz="1600" dirty="0"/>
           </a:p>
         </p:txBody>
       </p:sp>
@@ -1762,8 +1851,8 @@
         </p:nvSpPr>
         <p:spPr>
           <a:xfrm>
-            <a:off x="640080" y="1645920"/>
-            <a:ext cx="10972800" cy="4663440"/>
+            <a:off x="548640" y="2606040"/>
+            <a:ext cx="6949440" cy="640080"/>
           </a:xfrm>
           <a:prstGeom prst="rect">
             <a:avLst/>
@@ -1775,91 +1864,87 @@
           <a:bodyPr wrap="square" rtlCol="0" anchor="ctr"/>
           <a:lstStyle/>
           <a:p>
-            <a:pPr marL="342900" indent="-342900">
-              <a:spcAft>
-                <a:spcPts val="1000"/>
-              </a:spcAft>
-              <a:buSzPct val="100000"/>
-              <a:buChar char="•"/>
-            </a:pPr>
-            <a:r>
-              <a:rPr lang="en-US" sz="2000" dirty="0">
-                <a:solidFill>
-                  <a:srgbClr val="F4E6C1"/>
-                </a:solidFill>
-                <a:latin typeface="Georgia" pitchFamily="34" charset="0"/>
-                <a:ea typeface="Georgia" pitchFamily="34" charset="-122"/>
-                <a:cs typeface="Georgia" pitchFamily="34" charset="-120"/>
-              </a:rPr>
-              <a:t>Interactive 3D game of the Turkic Epic of Koroghlu</a:t>
-            </a:r>
-            <a:endParaRPr lang="en-US" sz="2000" dirty="0"/>
-          </a:p>
-          <a:p>
-            <a:pPr marL="342900" indent="-342900">
-              <a:spcAft>
-                <a:spcPts val="1000"/>
-              </a:spcAft>
-              <a:buSzPct val="100000"/>
-              <a:buChar char="•"/>
-            </a:pPr>
-            <a:r>
-              <a:rPr lang="en-US" sz="2000" dirty="0">
-                <a:solidFill>
-                  <a:srgbClr val="F4E6C1"/>
-                </a:solidFill>
-                <a:latin typeface="Georgia" pitchFamily="34" charset="0"/>
-                <a:ea typeface="Georgia" pitchFamily="34" charset="-122"/>
-                <a:cs typeface="Georgia" pitchFamily="34" charset="-120"/>
-              </a:rPr>
-              <a:t>Players learn heritage by riding, choosing, and reciting</a:t>
-            </a:r>
-            <a:endParaRPr lang="en-US" sz="2000" dirty="0"/>
-          </a:p>
-          <a:p>
-            <a:pPr marL="342900" indent="-342900">
-              <a:spcAft>
-                <a:spcPts val="1000"/>
-              </a:spcAft>
-              <a:buSzPct val="100000"/>
-              <a:buChar char="•"/>
-            </a:pPr>
-            <a:r>
-              <a:rPr lang="en-US" sz="2000" dirty="0">
-                <a:solidFill>
-                  <a:srgbClr val="F4E6C1"/>
-                </a:solidFill>
-                <a:latin typeface="Georgia" pitchFamily="34" charset="0"/>
-                <a:ea typeface="Georgia" pitchFamily="34" charset="-122"/>
-                <a:cs typeface="Georgia" pitchFamily="34" charset="-120"/>
-              </a:rPr>
-              <a:t>Hackathon prototype: combat, ally/enemy AI, Nigar, Çamlıbel</a:t>
-            </a:r>
-            <a:endParaRPr lang="en-US" sz="2000" dirty="0"/>
-          </a:p>
-          <a:p>
-            <a:pPr marL="342900" indent="-342900">
-              <a:spcAft>
-                <a:spcPts val="1000"/>
-              </a:spcAft>
-              <a:buSzPct val="100000"/>
-              <a:buChar char="•"/>
-            </a:pPr>
-            <a:r>
-              <a:rPr lang="en-US" sz="2000" dirty="0">
-                <a:solidFill>
-                  <a:srgbClr val="F4E6C1"/>
-                </a:solidFill>
-                <a:latin typeface="Georgia" pitchFamily="34" charset="0"/>
-                <a:ea typeface="Georgia" pitchFamily="34" charset="-122"/>
-                <a:cs typeface="Georgia" pitchFamily="34" charset="-120"/>
-              </a:rPr>
-              <a:t>Canonical tale: Wikipedia — Epic of Koroghlu</a:t>
-            </a:r>
-            <a:endParaRPr lang="en-US" sz="2000" dirty="0"/>
-          </a:p>
-        </p:txBody>
-      </p:sp>
+            <a:pPr indent="0" marL="0">
+              <a:buNone/>
+            </a:pPr>
+            <a:r>
+              <a:rPr lang="en-US" sz="2800" dirty="0">
+                <a:solidFill>
+                  <a:srgbClr val="F4E6C1"/>
+                </a:solidFill>
+                <a:latin typeface="Georgia" pitchFamily="34" charset="0"/>
+                <a:ea typeface="Georgia" pitchFamily="34" charset="-122"/>
+                <a:cs typeface="Georgia" pitchFamily="34" charset="-120"/>
+              </a:rPr>
+              <a:t>My name is Gunash Farzaliyev</a:t>
+            </a:r>
+            <a:endParaRPr lang="en-US" sz="2800" dirty="0"/>
+          </a:p>
+        </p:txBody>
+      </p:sp>
+      <p:sp>
+        <p:nvSpPr>
+          <p:cNvPr id="5" name="Text 3"/>
+          <p:cNvSpPr/>
+          <p:nvPr/>
+        </p:nvSpPr>
+        <p:spPr>
+          <a:xfrm>
+            <a:off x="548640" y="3337560"/>
+            <a:ext cx="6949440" cy="502920"/>
+          </a:xfrm>
+          <a:prstGeom prst="rect">
+            <a:avLst/>
+          </a:prstGeom>
+          <a:noFill/>
+          <a:ln/>
+        </p:spPr>
+        <p:txBody>
+          <a:bodyPr wrap="square" rtlCol="0" anchor="ctr"/>
+          <a:lstStyle/>
+          <a:p>
+            <a:pPr indent="0" marL="0">
+              <a:buNone/>
+            </a:pPr>
+            <a:r>
+              <a:rPr lang="en-US" sz="1800" dirty="0">
+                <a:solidFill>
+                  <a:srgbClr val="C9A227"/>
+                </a:solidFill>
+                <a:latin typeface="Georgia" pitchFamily="34" charset="0"/>
+                <a:ea typeface="Georgia" pitchFamily="34" charset="-122"/>
+                <a:cs typeface="Georgia" pitchFamily="34" charset="-120"/>
+              </a:rPr>
+              <a:t>A playable Three.js dastan of the Epic of Koroghlu</a:t>
+            </a:r>
+            <a:endParaRPr lang="en-US" sz="1800" dirty="0"/>
+          </a:p>
+        </p:txBody>
+      </p:sp>
+      <p:pic>
+        <p:nvPicPr>
+          <p:cNvPr id="6" name="Image 0" descr="/home/oyren/workspace/KorogluDnD/docs/gunash-farzaliyev.jpg">    </p:cNvPr>
+          <p:cNvPicPr>
+            <a:picLocks noChangeAspect="1"/>
+          </p:cNvPicPr>
+          <p:nvPr/>
+        </p:nvPicPr>
+        <p:blipFill>
+          <a:blip r:embed="rId1"/>
+          <a:stretch>
+            <a:fillRect/>
+          </a:stretch>
+        </p:blipFill>
+        <p:spPr>
+          <a:xfrm>
+            <a:off x="7818120" y="411480"/>
+            <a:ext cx="3840480" cy="6035040"/>
+          </a:xfrm>
+          <a:prstGeom prst="rect">
+            <a:avLst/>
+          </a:prstGeom>
+        </p:spPr>
+      </p:pic>
     </p:spTree>
   </p:cSld>
   <p:clrMapOvr>
@@ -1925,6 +2010,243 @@
                 <a:ea typeface="Georgia" pitchFamily="34" charset="-122"/>
                 <a:cs typeface="Georgia" pitchFamily="34" charset="-120"/>
               </a:rPr>
+              <a:t>What to judge</a:t>
+            </a:r>
+            <a:endParaRPr lang="en-US" sz="3600" dirty="0"/>
+          </a:p>
+        </p:txBody>
+      </p:sp>
+      <p:sp>
+        <p:nvSpPr>
+          <p:cNvPr id="3" name="Text 1"/>
+          <p:cNvSpPr/>
+          <p:nvPr/>
+        </p:nvSpPr>
+        <p:spPr>
+          <a:xfrm>
+            <a:off x="548640" y="1024128"/>
+            <a:ext cx="11064240" cy="457200"/>
+          </a:xfrm>
+          <a:prstGeom prst="rect">
+            <a:avLst/>
+          </a:prstGeom>
+          <a:noFill/>
+          <a:ln/>
+        </p:spPr>
+        <p:txBody>
+          <a:bodyPr wrap="square" rtlCol="0" anchor="ctr"/>
+          <a:lstStyle/>
+          <a:p>
+            <a:pPr indent="0" marL="0">
+              <a:buNone/>
+            </a:pPr>
+            <a:r>
+              <a:rPr lang="en-US" sz="1800" i="1" dirty="0">
+                <a:solidFill>
+                  <a:srgbClr val="C9A227"/>
+                </a:solidFill>
+                <a:latin typeface="Georgia" pitchFamily="34" charset="0"/>
+                <a:ea typeface="Georgia" pitchFamily="34" charset="-122"/>
+                <a:cs typeface="Georgia" pitchFamily="34" charset="-120"/>
+              </a:rPr>
+              <a:t>Priority when features conflict</a:t>
+            </a:r>
+            <a:endParaRPr lang="en-US" sz="1800" dirty="0"/>
+          </a:p>
+        </p:txBody>
+      </p:sp>
+      <p:sp>
+        <p:nvSpPr>
+          <p:cNvPr id="4" name="Text 2"/>
+          <p:cNvSpPr/>
+          <p:nvPr/>
+        </p:nvSpPr>
+        <p:spPr>
+          <a:xfrm>
+            <a:off x="640080" y="1645920"/>
+            <a:ext cx="10972800" cy="4663440"/>
+          </a:xfrm>
+          <a:prstGeom prst="rect">
+            <a:avLst/>
+          </a:prstGeom>
+          <a:noFill/>
+          <a:ln/>
+        </p:spPr>
+        <p:txBody>
+          <a:bodyPr wrap="square" rtlCol="0" anchor="ctr"/>
+          <a:lstStyle/>
+          <a:p>
+            <a:pPr marL="342900" indent="-342900">
+              <a:spcAft>
+                <a:spcPts val="1000"/>
+              </a:spcAft>
+              <a:buSzPct val="100000"/>
+              <a:buChar char="•"/>
+            </a:pPr>
+            <a:r>
+              <a:rPr lang="en-US" sz="2000" dirty="0">
+                <a:solidFill>
+                  <a:srgbClr val="F4E6C1"/>
+                </a:solidFill>
+                <a:latin typeface="Georgia" pitchFamily="34" charset="0"/>
+                <a:ea typeface="Georgia" pitchFamily="34" charset="-122"/>
+                <a:cs typeface="Georgia" pitchFamily="34" charset="-120"/>
+              </a:rPr>
+              <a:t>Cultural authenticity first</a:t>
+            </a:r>
+            <a:endParaRPr lang="en-US" sz="2000" dirty="0"/>
+          </a:p>
+          <a:p>
+            <a:pPr marL="342900" indent="-342900">
+              <a:spcAft>
+                <a:spcPts val="1000"/>
+              </a:spcAft>
+              <a:buSzPct val="100000"/>
+              <a:buChar char="•"/>
+            </a:pPr>
+            <a:r>
+              <a:rPr lang="en-US" sz="2000" dirty="0">
+                <a:solidFill>
+                  <a:srgbClr val="F4E6C1"/>
+                </a:solidFill>
+                <a:latin typeface="Georgia" pitchFamily="34" charset="0"/>
+                <a:ea typeface="Georgia" pitchFamily="34" charset="-122"/>
+                <a:cs typeface="Georgia" pitchFamily="34" charset="-120"/>
+              </a:rPr>
+              <a:t>Then a playable combat and AI loop</a:t>
+            </a:r>
+            <a:endParaRPr lang="en-US" sz="2000" dirty="0"/>
+          </a:p>
+          <a:p>
+            <a:pPr marL="342900" indent="-342900">
+              <a:spcAft>
+                <a:spcPts val="1000"/>
+              </a:spcAft>
+              <a:buSzPct val="100000"/>
+              <a:buChar char="•"/>
+            </a:pPr>
+            <a:r>
+              <a:rPr lang="en-US" sz="2000" dirty="0">
+                <a:solidFill>
+                  <a:srgbClr val="F4E6C1"/>
+                </a:solidFill>
+                <a:latin typeface="Georgia" pitchFamily="34" charset="0"/>
+                <a:ea typeface="Georgia" pitchFamily="34" charset="-122"/>
+                <a:cs typeface="Georgia" pitchFamily="34" charset="-120"/>
+              </a:rPr>
+              <a:t>Then generative / branching narrative</a:t>
+            </a:r>
+            <a:endParaRPr lang="en-US" sz="2000" dirty="0"/>
+          </a:p>
+          <a:p>
+            <a:pPr marL="342900" indent="-342900">
+              <a:spcAft>
+                <a:spcPts val="1000"/>
+              </a:spcAft>
+              <a:buSzPct val="100000"/>
+              <a:buChar char="•"/>
+            </a:pPr>
+            <a:r>
+              <a:rPr lang="en-US" sz="2000" dirty="0">
+                <a:solidFill>
+                  <a:srgbClr val="F4E6C1"/>
+                </a:solidFill>
+                <a:latin typeface="Georgia" pitchFamily="34" charset="0"/>
+                <a:ea typeface="Georgia" pitchFamily="34" charset="-122"/>
+                <a:cs typeface="Georgia" pitchFamily="34" charset="-120"/>
+              </a:rPr>
+              <a:t>Then polish</a:t>
+            </a:r>
+            <a:endParaRPr lang="en-US" sz="2000" dirty="0"/>
+          </a:p>
+          <a:p>
+            <a:pPr marL="342900" indent="-342900">
+              <a:spcAft>
+                <a:spcPts val="1000"/>
+              </a:spcAft>
+              <a:buSzPct val="100000"/>
+              <a:buChar char="•"/>
+            </a:pPr>
+            <a:r>
+              <a:rPr lang="en-US" sz="2000" dirty="0">
+                <a:solidFill>
+                  <a:srgbClr val="F4E6C1"/>
+                </a:solidFill>
+                <a:latin typeface="Georgia" pitchFamily="34" charset="0"/>
+                <a:ea typeface="Georgia" pitchFamily="34" charset="-122"/>
+                <a:cs typeface="Georgia" pitchFamily="34" charset="-120"/>
+              </a:rPr>
+              <a:t>This prototype proves the loop in a few minutes of play</a:t>
+            </a:r>
+            <a:endParaRPr lang="en-US" sz="2000" dirty="0"/>
+          </a:p>
+        </p:txBody>
+      </p:sp>
+    </p:spTree>
+  </p:cSld>
+  <p:clrMapOvr>
+    <a:masterClrMapping/>
+  </p:clrMapOvr>
+</p:sld>
+</file>
+
+<file path=ppt/slides/slide11.xml><?xml version="1.0" encoding="utf-8"?>
+<p:sld xmlns:a="http://schemas.openxmlformats.org/drawingml/2006/main" xmlns:r="http://schemas.openxmlformats.org/officeDocument/2006/relationships" xmlns:p="http://schemas.openxmlformats.org/presentationml/2006/main">
+  <p:cSld name="Slide 11">
+    <p:bg>
+      <p:bgPr>
+        <a:solidFill>
+          <a:srgbClr val="1A1208"/>
+        </a:solidFill>
+      </p:bgPr>
+    </p:bg>
+    <p:spTree>
+      <p:nvGrpSpPr>
+        <p:cNvPr id="1" name=""/>
+        <p:cNvGrpSpPr/>
+        <p:nvPr/>
+      </p:nvGrpSpPr>
+      <p:grpSpPr>
+        <a:xfrm>
+          <a:off x="0" y="0"/>
+          <a:ext cx="0" cy="0"/>
+          <a:chOff x="0" y="0"/>
+          <a:chExt cx="0" cy="0"/>
+        </a:xfrm>
+      </p:grpSpPr>
+      <p:sp>
+        <p:nvSpPr>
+          <p:cNvPr id="2" name="Text 0"/>
+          <p:cNvSpPr/>
+          <p:nvPr/>
+        </p:nvSpPr>
+        <p:spPr>
+          <a:xfrm>
+            <a:off x="548640" y="256032"/>
+            <a:ext cx="11064240" cy="777240"/>
+          </a:xfrm>
+          <a:prstGeom prst="rect">
+            <a:avLst/>
+          </a:prstGeom>
+          <a:noFill/>
+          <a:ln/>
+        </p:spPr>
+        <p:txBody>
+          <a:bodyPr wrap="square" rtlCol="0" anchor="ctr"/>
+          <a:lstStyle/>
+          <a:p>
+            <a:pPr indent="0" marL="0">
+              <a:buNone/>
+            </a:pPr>
+            <a:r>
+              <a:rPr lang="en-US" sz="3600" b="1" dirty="0">
+                <a:solidFill>
+                  <a:srgbClr val="E8C64A"/>
+                </a:solidFill>
+                <a:latin typeface="Georgia" pitchFamily="34" charset="0"/>
+                <a:ea typeface="Georgia" pitchFamily="34" charset="-122"/>
+                <a:cs typeface="Georgia" pitchFamily="34" charset="-120"/>
+              </a:rPr>
               <a:t>Sources</a:t>
             </a:r>
             <a:endParaRPr lang="en-US" sz="3600" dirty="0"/>
@@ -2162,7 +2484,7 @@
                 <a:ea typeface="Georgia" pitchFamily="34" charset="-122"/>
                 <a:cs typeface="Georgia" pitchFamily="34" charset="-120"/>
               </a:rPr>
-              <a:t>The user and the problem</a:t>
+              <a:t>Epic of Koroglu</a:t>
             </a:r>
             <a:endParaRPr lang="en-US" sz="3600" dirty="0"/>
           </a:p>
@@ -2201,7 +2523,7 @@
                 <a:ea typeface="Georgia" pitchFamily="34" charset="-122"/>
                 <a:cs typeface="Georgia" pitchFamily="34" charset="-120"/>
               </a:rPr>
-              <a:t>Who this is for — and what goes wrong for them today. Not “everyone.”</a:t>
+              <a:t>A playable Three.js dastan — not a lecture</a:t>
             </a:r>
             <a:endParaRPr lang="en-US" sz="1800" dirty="0"/>
           </a:p>
@@ -2244,70 +2566,70 @@
                 <a:ea typeface="Georgia" pitchFamily="34" charset="-122"/>
                 <a:cs typeface="Georgia" pitchFamily="34" charset="-120"/>
               </a:rPr>
-              <a:t>A 15–18-year-old in an Azerbaijani / Turkish / Turkmen class or diaspora school: they know the name from a statue or exam. Today they get recitation or Wikipedia — they never ride, never choose, they close the tab.</a:t>
-            </a:r>
-            <a:endParaRPr lang="en-US" sz="2000" dirty="0"/>
-          </a:p>
-          <a:p>
-            <a:pPr marL="342900" indent="-342900">
-              <a:spcAft>
-                <a:spcPts val="1000"/>
-              </a:spcAft>
-              <a:buSzPct val="100000"/>
-              <a:buChar char="•"/>
-            </a:pPr>
-            <a:r>
-              <a:rPr lang="en-US" sz="2000" dirty="0">
-                <a:solidFill>
-                  <a:srgbClr val="F4E6C1"/>
-                </a:solidFill>
-                <a:latin typeface="Georgia" pitchFamily="34" charset="0"/>
-                <a:ea typeface="Georgia" pitchFamily="34" charset="-122"/>
-                <a:cs typeface="Georgia" pitchFamily="34" charset="-120"/>
-              </a:rPr>
-              <a:t>A heritage teacher with one short period: they cannot assign a 400-page dastan. Today they show a slide titled “Epic of Koroglu” and hope a summary sticks. They have no 2-minute thing a student can play.</a:t>
-            </a:r>
-            <a:endParaRPr lang="en-US" sz="2000" dirty="0"/>
-          </a:p>
-          <a:p>
-            <a:pPr marL="342900" indent="-342900">
-              <a:spcAft>
-                <a:spcPts val="1000"/>
-              </a:spcAft>
-              <a:buSzPct val="100000"/>
-              <a:buChar char="•"/>
-            </a:pPr>
-            <a:r>
-              <a:rPr lang="en-US" sz="2000" dirty="0">
-                <a:solidFill>
-                  <a:srgbClr val="F4E6C1"/>
-                </a:solidFill>
-                <a:latin typeface="Georgia" pitchFamily="34" charset="0"/>
-                <a:ea typeface="Georgia" pitchFamily="34" charset="-122"/>
-                <a:cs typeface="Georgia" pitchFamily="34" charset="-120"/>
-              </a:rPr>
-              <a:t>A young gamer who already spends an hour on horses and swords: that hour goes to a made-up kingdom. Their own oral epic sits unused next to the habit that could carry it.</a:t>
-            </a:r>
-            <a:endParaRPr lang="en-US" sz="2000" dirty="0"/>
-          </a:p>
-          <a:p>
-            <a:pPr marL="342900" indent="-342900">
-              <a:spcAft>
-                <a:spcPts val="1000"/>
-              </a:spcAft>
-              <a:buSzPct val="100000"/>
-              <a:buChar char="•"/>
-            </a:pPr>
-            <a:r>
-              <a:rPr lang="en-US" sz="2000" dirty="0">
-                <a:solidFill>
-                  <a:srgbClr val="F4E6C1"/>
-                </a:solidFill>
-                <a:latin typeface="Georgia" pitchFamily="34" charset="0"/>
-                <a:ea typeface="Georgia" pitchFamily="34" charset="-122"/>
-                <a:cs typeface="Georgia" pitchFamily="34" charset="-120"/>
-              </a:rPr>
-              <a:t>The encyclopedia already exists. What fails is practice: no mounted choice, no verse as courage, no moral fork they can get wrong.</a:t>
+              <a:t>Interactive 3D game of the Turkic Epic of Koroghlu</a:t>
+            </a:r>
+            <a:endParaRPr lang="en-US" sz="2000" dirty="0"/>
+          </a:p>
+          <a:p>
+            <a:pPr marL="342900" indent="-342900">
+              <a:spcAft>
+                <a:spcPts val="1000"/>
+              </a:spcAft>
+              <a:buSzPct val="100000"/>
+              <a:buChar char="•"/>
+            </a:pPr>
+            <a:r>
+              <a:rPr lang="en-US" sz="2000" dirty="0">
+                <a:solidFill>
+                  <a:srgbClr val="F4E6C1"/>
+                </a:solidFill>
+                <a:latin typeface="Georgia" pitchFamily="34" charset="0"/>
+                <a:ea typeface="Georgia" pitchFamily="34" charset="-122"/>
+                <a:cs typeface="Georgia" pitchFamily="34" charset="-120"/>
+              </a:rPr>
+              <a:t>Players learn heritage by riding, choosing, and reciting</a:t>
+            </a:r>
+            <a:endParaRPr lang="en-US" sz="2000" dirty="0"/>
+          </a:p>
+          <a:p>
+            <a:pPr marL="342900" indent="-342900">
+              <a:spcAft>
+                <a:spcPts val="1000"/>
+              </a:spcAft>
+              <a:buSzPct val="100000"/>
+              <a:buChar char="•"/>
+            </a:pPr>
+            <a:r>
+              <a:rPr lang="en-US" sz="2000" dirty="0">
+                <a:solidFill>
+                  <a:srgbClr val="F4E6C1"/>
+                </a:solidFill>
+                <a:latin typeface="Georgia" pitchFamily="34" charset="0"/>
+                <a:ea typeface="Georgia" pitchFamily="34" charset="-122"/>
+                <a:cs typeface="Georgia" pitchFamily="34" charset="-120"/>
+              </a:rPr>
+              <a:t>Hackathon prototype: combat, ally/enemy AI, Nigar, Çamlıbel</a:t>
+            </a:r>
+            <a:endParaRPr lang="en-US" sz="2000" dirty="0"/>
+          </a:p>
+          <a:p>
+            <a:pPr marL="342900" indent="-342900">
+              <a:spcAft>
+                <a:spcPts val="1000"/>
+              </a:spcAft>
+              <a:buSzPct val="100000"/>
+              <a:buChar char="•"/>
+            </a:pPr>
+            <a:r>
+              <a:rPr lang="en-US" sz="2000" dirty="0">
+                <a:solidFill>
+                  <a:srgbClr val="F4E6C1"/>
+                </a:solidFill>
+                <a:latin typeface="Georgia" pitchFamily="34" charset="0"/>
+                <a:ea typeface="Georgia" pitchFamily="34" charset="-122"/>
+                <a:cs typeface="Georgia" pitchFamily="34" charset="-120"/>
+              </a:rPr>
+              <a:t>Canonical tale: Wikipedia — Epic of Koroghlu</a:t>
             </a:r>
             <a:endParaRPr lang="en-US" sz="2000" dirty="0"/>
           </a:p>
@@ -2378,7 +2700,7 @@
                 <a:ea typeface="Georgia" pitchFamily="34" charset="-122"/>
                 <a:cs typeface="Georgia" pitchFamily="34" charset="-120"/>
               </a:rPr>
-              <a:t>The outcome</a:t>
+              <a:t>The user and the problem</a:t>
             </a:r>
             <a:endParaRPr lang="en-US" sz="3600" dirty="0"/>
           </a:p>
@@ -2417,7 +2739,7 @@
                 <a:ea typeface="Georgia" pitchFamily="34" charset="-122"/>
                 <a:cs typeface="Georgia" pitchFamily="34" charset="-120"/>
               </a:rPr>
-              <a:t>Culture sticks because it was played</a:t>
+              <a:t>Who this is for — and what goes wrong for them today. Not “everyone.”</a:t>
             </a:r>
             <a:endParaRPr lang="en-US" sz="1800" dirty="0"/>
           </a:p>
@@ -2460,70 +2782,70 @@
                 <a:ea typeface="Georgia" pitchFamily="34" charset="-122"/>
                 <a:cs typeface="Georgia" pitchFamily="34" charset="-120"/>
               </a:rPr>
-              <a:t>Act the MVP loop: blinded father → allies → combat → rescue Nigar → take the keep</a:t>
-            </a:r>
-            <a:endParaRPr lang="en-US" sz="2000" dirty="0"/>
-          </a:p>
-          <a:p>
-            <a:pPr marL="342900" indent="-342900">
-              <a:spcAft>
-                <a:spcPts val="1000"/>
-              </a:spcAft>
-              <a:buSzPct val="100000"/>
-              <a:buChar char="•"/>
-            </a:pPr>
-            <a:r>
-              <a:rPr lang="en-US" sz="2000" dirty="0">
-                <a:solidFill>
-                  <a:srgbClr val="F4E6C1"/>
-                </a:solidFill>
-                <a:latin typeface="Georgia" pitchFamily="34" charset="0"/>
-                <a:ea typeface="Georgia" pitchFamily="34" charset="-122"/>
-                <a:cs typeface="Georgia" pitchFamily="34" charset="-120"/>
-              </a:rPr>
-              <a:t>Values practiced in play: justice over revenge, protect the weak, poetry as courage</a:t>
-            </a:r>
-            <a:endParaRPr lang="en-US" sz="2000" dirty="0"/>
-          </a:p>
-          <a:p>
-            <a:pPr marL="342900" indent="-342900">
-              <a:spcAft>
-                <a:spcPts val="1000"/>
-              </a:spcAft>
-              <a:buSzPct val="100000"/>
-              <a:buChar char="•"/>
-            </a:pPr>
-            <a:r>
-              <a:rPr lang="en-US" sz="2000" dirty="0">
-                <a:solidFill>
-                  <a:srgbClr val="F4E6C1"/>
-                </a:solidFill>
-                <a:latin typeface="Georgia" pitchFamily="34" charset="0"/>
-                <a:ea typeface="Georgia" pitchFamily="34" charset="-122"/>
-                <a:cs typeface="Georgia" pitchFamily="34" charset="-120"/>
-              </a:rPr>
-              <a:t>Proposal benchmark: higher heritage retention vs text-only learning</a:t>
-            </a:r>
-            <a:endParaRPr lang="en-US" sz="2000" dirty="0"/>
-          </a:p>
-          <a:p>
-            <a:pPr marL="342900" indent="-342900">
-              <a:spcAft>
-                <a:spcPts val="1000"/>
-              </a:spcAft>
-              <a:buSzPct val="100000"/>
-              <a:buChar char="•"/>
-            </a:pPr>
-            <a:r>
-              <a:rPr lang="en-US" sz="2000" dirty="0">
-                <a:solidFill>
-                  <a:srgbClr val="F4E6C1"/>
-                </a:solidFill>
-                <a:latin typeface="Georgia" pitchFamily="34" charset="0"/>
-                <a:ea typeface="Georgia" pitchFamily="34" charset="-122"/>
-                <a:cs typeface="Georgia" pitchFamily="34" charset="-120"/>
-              </a:rPr>
-              <a:t>Visible success: ally joins, verse slows a tyrant’s rider, Nigar is free, gate opens</a:t>
+              <a:t>A 15–18-year-old in an Azerbaijani / Turkish / Turkmen class or diaspora school: they know the name from a statue or exam. Today they get recitation or Wikipedia — they never ride, never choose, they close the tab.</a:t>
+            </a:r>
+            <a:endParaRPr lang="en-US" sz="2000" dirty="0"/>
+          </a:p>
+          <a:p>
+            <a:pPr marL="342900" indent="-342900">
+              <a:spcAft>
+                <a:spcPts val="1000"/>
+              </a:spcAft>
+              <a:buSzPct val="100000"/>
+              <a:buChar char="•"/>
+            </a:pPr>
+            <a:r>
+              <a:rPr lang="en-US" sz="2000" dirty="0">
+                <a:solidFill>
+                  <a:srgbClr val="F4E6C1"/>
+                </a:solidFill>
+                <a:latin typeface="Georgia" pitchFamily="34" charset="0"/>
+                <a:ea typeface="Georgia" pitchFamily="34" charset="-122"/>
+                <a:cs typeface="Georgia" pitchFamily="34" charset="-120"/>
+              </a:rPr>
+              <a:t>A heritage teacher with one short period: they cannot assign a 400-page dastan. Today they show a slide titled “Epic of Koroglu” and hope a summary sticks. They have no 2-minute thing a student can play.</a:t>
+            </a:r>
+            <a:endParaRPr lang="en-US" sz="2000" dirty="0"/>
+          </a:p>
+          <a:p>
+            <a:pPr marL="342900" indent="-342900">
+              <a:spcAft>
+                <a:spcPts val="1000"/>
+              </a:spcAft>
+              <a:buSzPct val="100000"/>
+              <a:buChar char="•"/>
+            </a:pPr>
+            <a:r>
+              <a:rPr lang="en-US" sz="2000" dirty="0">
+                <a:solidFill>
+                  <a:srgbClr val="F4E6C1"/>
+                </a:solidFill>
+                <a:latin typeface="Georgia" pitchFamily="34" charset="0"/>
+                <a:ea typeface="Georgia" pitchFamily="34" charset="-122"/>
+                <a:cs typeface="Georgia" pitchFamily="34" charset="-120"/>
+              </a:rPr>
+              <a:t>A young gamer who already spends an hour on horses and swords: that hour goes to a made-up kingdom. Their own oral epic sits unused next to the habit that could carry it.</a:t>
+            </a:r>
+            <a:endParaRPr lang="en-US" sz="2000" dirty="0"/>
+          </a:p>
+          <a:p>
+            <a:pPr marL="342900" indent="-342900">
+              <a:spcAft>
+                <a:spcPts val="1000"/>
+              </a:spcAft>
+              <a:buSzPct val="100000"/>
+              <a:buChar char="•"/>
+            </a:pPr>
+            <a:r>
+              <a:rPr lang="en-US" sz="2000" dirty="0">
+                <a:solidFill>
+                  <a:srgbClr val="F4E6C1"/>
+                </a:solidFill>
+                <a:latin typeface="Georgia" pitchFamily="34" charset="0"/>
+                <a:ea typeface="Georgia" pitchFamily="34" charset="-122"/>
+                <a:cs typeface="Georgia" pitchFamily="34" charset="-120"/>
+              </a:rPr>
+              <a:t>The encyclopedia already exists. What fails is practice: no mounted choice, no verse as courage, no moral fork they can get wrong.</a:t>
             </a:r>
             <a:endParaRPr lang="en-US" sz="2000" dirty="0"/>
           </a:p>
@@ -2594,7 +2916,7 @@
                 <a:ea typeface="Georgia" pitchFamily="34" charset="-122"/>
                 <a:cs typeface="Georgia" pitchFamily="34" charset="-120"/>
               </a:rPr>
-              <a:t>Core player loop</a:t>
+              <a:t>The outcome</a:t>
             </a:r>
             <a:endParaRPr lang="en-US" sz="3600" dirty="0"/>
           </a:p>
@@ -2633,7 +2955,7 @@
                 <a:ea typeface="Georgia" pitchFamily="34" charset="-122"/>
                 <a:cs typeface="Georgia" pitchFamily="34" charset="-120"/>
               </a:rPr>
-              <a:t>Ship this arc — do not invent a conflicting plot</a:t>
+              <a:t>Culture sticks because it was played</a:t>
             </a:r>
             <a:endParaRPr lang="en-US" sz="1800" dirty="0"/>
           </a:p>
@@ -2676,91 +2998,70 @@
                 <a:ea typeface="Georgia" pitchFamily="34" charset="-122"/>
                 <a:cs typeface="Georgia" pitchFamily="34" charset="-120"/>
               </a:rPr>
-              <a:t>1. Ali Kishi is blinded for telling the truth about the colt Kırat</a:t>
-            </a:r>
-            <a:endParaRPr lang="en-US" sz="2000" dirty="0"/>
-          </a:p>
-          <a:p>
-            <a:pPr marL="342900" indent="-342900">
-              <a:spcAft>
-                <a:spcPts val="1000"/>
-              </a:spcAft>
-              <a:buSzPct val="100000"/>
-              <a:buChar char="•"/>
-            </a:pPr>
-            <a:r>
-              <a:rPr lang="en-US" sz="2000" dirty="0">
-                <a:solidFill>
-                  <a:srgbClr val="F4E6C1"/>
-                </a:solidFill>
-                <a:latin typeface="Georgia" pitchFamily="34" charset="0"/>
-                <a:ea typeface="Georgia" pitchFamily="34" charset="-122"/>
-                <a:cs typeface="Georgia" pitchFamily="34" charset="-120"/>
-              </a:rPr>
-              <a:t>2. Recruit ally minds: Deli Hasan, Ayvaz</a:t>
-            </a:r>
-            <a:endParaRPr lang="en-US" sz="2000" dirty="0"/>
-          </a:p>
-          <a:p>
-            <a:pPr marL="342900" indent="-342900">
-              <a:spcAft>
-                <a:spcPts val="1000"/>
-              </a:spcAft>
-              <a:buSzPct val="100000"/>
-              <a:buChar char="•"/>
-            </a:pPr>
-            <a:r>
-              <a:rPr lang="en-US" sz="2000" dirty="0">
-                <a:solidFill>
-                  <a:srgbClr val="F4E6C1"/>
-                </a:solidFill>
-                <a:latin typeface="Georgia" pitchFamily="34" charset="0"/>
-                <a:ea typeface="Georgia" pitchFamily="34" charset="-122"/>
-                <a:cs typeface="Georgia" pitchFamily="34" charset="-120"/>
-              </a:rPr>
-              <a:t>3. Mounted combat: saber and verse against Bolu Bey’s riders</a:t>
-            </a:r>
-            <a:endParaRPr lang="en-US" sz="2000" dirty="0"/>
-          </a:p>
-          <a:p>
-            <a:pPr marL="342900" indent="-342900">
-              <a:spcAft>
-                <a:spcPts val="1000"/>
-              </a:spcAft>
-              <a:buSzPct val="100000"/>
-              <a:buChar char="•"/>
-            </a:pPr>
-            <a:r>
-              <a:rPr lang="en-US" sz="2000" dirty="0">
-                <a:solidFill>
-                  <a:srgbClr val="F4E6C1"/>
-                </a:solidFill>
-                <a:latin typeface="Georgia" pitchFamily="34" charset="0"/>
-                <a:ea typeface="Georgia" pitchFamily="34" charset="-122"/>
-                <a:cs typeface="Georgia" pitchFamily="34" charset="-120"/>
-              </a:rPr>
-              <a:t>4. Rescue Nigar from the captain</a:t>
-            </a:r>
-            <a:endParaRPr lang="en-US" sz="2000" dirty="0"/>
-          </a:p>
-          <a:p>
-            <a:pPr marL="342900" indent="-342900">
-              <a:spcAft>
-                <a:spcPts val="1000"/>
-              </a:spcAft>
-              <a:buSzPct val="100000"/>
-              <a:buChar char="•"/>
-            </a:pPr>
-            <a:r>
-              <a:rPr lang="en-US" sz="2000" dirty="0">
-                <a:solidFill>
-                  <a:srgbClr val="F4E6C1"/>
-                </a:solidFill>
-                <a:latin typeface="Georgia" pitchFamily="34" charset="0"/>
-                <a:ea typeface="Georgia" pitchFamily="34" charset="-122"/>
-                <a:cs typeface="Georgia" pitchFamily="34" charset="-120"/>
-              </a:rPr>
-              <a:t>5. Capture Çamlıbel as a home for the just — not a trophy</a:t>
+              <a:t>Act the MVP loop: blinded father → allies → combat → rescue Nigar → take the keep</a:t>
+            </a:r>
+            <a:endParaRPr lang="en-US" sz="2000" dirty="0"/>
+          </a:p>
+          <a:p>
+            <a:pPr marL="342900" indent="-342900">
+              <a:spcAft>
+                <a:spcPts val="1000"/>
+              </a:spcAft>
+              <a:buSzPct val="100000"/>
+              <a:buChar char="•"/>
+            </a:pPr>
+            <a:r>
+              <a:rPr lang="en-US" sz="2000" dirty="0">
+                <a:solidFill>
+                  <a:srgbClr val="F4E6C1"/>
+                </a:solidFill>
+                <a:latin typeface="Georgia" pitchFamily="34" charset="0"/>
+                <a:ea typeface="Georgia" pitchFamily="34" charset="-122"/>
+                <a:cs typeface="Georgia" pitchFamily="34" charset="-120"/>
+              </a:rPr>
+              <a:t>Values practiced in play: justice over revenge, protect the weak, poetry as courage</a:t>
+            </a:r>
+            <a:endParaRPr lang="en-US" sz="2000" dirty="0"/>
+          </a:p>
+          <a:p>
+            <a:pPr marL="342900" indent="-342900">
+              <a:spcAft>
+                <a:spcPts val="1000"/>
+              </a:spcAft>
+              <a:buSzPct val="100000"/>
+              <a:buChar char="•"/>
+            </a:pPr>
+            <a:r>
+              <a:rPr lang="en-US" sz="2000" dirty="0">
+                <a:solidFill>
+                  <a:srgbClr val="F4E6C1"/>
+                </a:solidFill>
+                <a:latin typeface="Georgia" pitchFamily="34" charset="0"/>
+                <a:ea typeface="Georgia" pitchFamily="34" charset="-122"/>
+                <a:cs typeface="Georgia" pitchFamily="34" charset="-120"/>
+              </a:rPr>
+              <a:t>Proposal benchmark: higher heritage retention vs text-only learning</a:t>
+            </a:r>
+            <a:endParaRPr lang="en-US" sz="2000" dirty="0"/>
+          </a:p>
+          <a:p>
+            <a:pPr marL="342900" indent="-342900">
+              <a:spcAft>
+                <a:spcPts val="1000"/>
+              </a:spcAft>
+              <a:buSzPct val="100000"/>
+              <a:buChar char="•"/>
+            </a:pPr>
+            <a:r>
+              <a:rPr lang="en-US" sz="2000" dirty="0">
+                <a:solidFill>
+                  <a:srgbClr val="F4E6C1"/>
+                </a:solidFill>
+                <a:latin typeface="Georgia" pitchFamily="34" charset="0"/>
+                <a:ea typeface="Georgia" pitchFamily="34" charset="-122"/>
+                <a:cs typeface="Georgia" pitchFamily="34" charset="-120"/>
+              </a:rPr>
+              <a:t>Visible success: ally joins, verse slows a tyrant’s rider, Nigar is free, gate opens</a:t>
             </a:r>
             <a:endParaRPr lang="en-US" sz="2000" dirty="0"/>
           </a:p>
@@ -2831,7 +3132,7 @@
                 <a:ea typeface="Georgia" pitchFamily="34" charset="-122"/>
                 <a:cs typeface="Georgia" pitchFamily="34" charset="-120"/>
               </a:rPr>
-              <a:t>Signature mechanics</a:t>
+              <a:t>Core player loop</a:t>
             </a:r>
             <a:endParaRPr lang="en-US" sz="3600" dirty="0"/>
           </a:p>
@@ -2870,7 +3171,7 @@
                 <a:ea typeface="Georgia" pitchFamily="34" charset="-122"/>
                 <a:cs typeface="Georgia" pitchFamily="34" charset="-120"/>
               </a:rPr>
-              <a:t>What makes this Koroglu, not a generic horse fighter</a:t>
+              <a:t>Ship this arc — do not invent a conflicting plot</a:t>
             </a:r>
             <a:endParaRPr lang="en-US" sz="1800" dirty="0"/>
           </a:p>
@@ -2913,91 +3214,91 @@
                 <a:ea typeface="Georgia" pitchFamily="34" charset="-122"/>
                 <a:cs typeface="Georgia" pitchFamily="34" charset="-120"/>
               </a:rPr>
-              <a:t>Mounted riding in a valley (click or Ride N / W / S / E)</a:t>
-            </a:r>
-            <a:endParaRPr lang="en-US" sz="2000" dirty="0"/>
-          </a:p>
-          <a:p>
-            <a:pPr marL="342900" indent="-342900">
-              <a:spcAft>
-                <a:spcPts val="1000"/>
-              </a:spcAft>
-              <a:buSzPct val="100000"/>
-              <a:buChar char="•"/>
-            </a:pPr>
-            <a:r>
-              <a:rPr lang="en-US" sz="2000" dirty="0">
-                <a:solidFill>
-                  <a:srgbClr val="F4E6C1"/>
-                </a:solidFill>
-                <a:latin typeface="Georgia" pitchFamily="34" charset="0"/>
-                <a:ea typeface="Georgia" pitchFamily="34" charset="-122"/>
-                <a:cs typeface="Georgia" pitchFamily="34" charset="-120"/>
-              </a:rPr>
-              <a:t>Sword combat with hit timing</a:t>
-            </a:r>
-            <a:endParaRPr lang="en-US" sz="2000" dirty="0"/>
-          </a:p>
-          <a:p>
-            <a:pPr marL="342900" indent="-342900">
-              <a:spcAft>
-                <a:spcPts val="1000"/>
-              </a:spcAft>
-              <a:buSzPct val="100000"/>
-              <a:buChar char="•"/>
-            </a:pPr>
-            <a:r>
-              <a:rPr lang="en-US" sz="2000" dirty="0">
-                <a:solidFill>
-                  <a:srgbClr val="F4E6C1"/>
-                </a:solidFill>
-                <a:latin typeface="Georgia" pitchFamily="34" charset="0"/>
-                <a:ea typeface="Georgia" pitchFamily="34" charset="-122"/>
-                <a:cs typeface="Georgia" pitchFamily="34" charset="-120"/>
-              </a:rPr>
-              <a:t>Poetry combat: recited verses demoralize enemies</a:t>
-            </a:r>
-            <a:endParaRPr lang="en-US" sz="2000" dirty="0"/>
-          </a:p>
-          <a:p>
-            <a:pPr marL="342900" indent="-342900">
-              <a:spcAft>
-                <a:spcPts val="1000"/>
-              </a:spcAft>
-              <a:buSzPct val="100000"/>
-              <a:buChar char="•"/>
-            </a:pPr>
-            <a:r>
-              <a:rPr lang="en-US" sz="2000" dirty="0">
-                <a:solidFill>
-                  <a:srgbClr val="F4E6C1"/>
-                </a:solidFill>
-                <a:latin typeface="Georgia" pitchFamily="34" charset="0"/>
-                <a:ea typeface="Georgia" pitchFamily="34" charset="-122"/>
-                <a:cs typeface="Georgia" pitchFamily="34" charset="-120"/>
-              </a:rPr>
-              <a:t>Ashik saz heals those who stand with song</a:t>
-            </a:r>
-            <a:endParaRPr lang="en-US" sz="2000" dirty="0"/>
-          </a:p>
-          <a:p>
-            <a:pPr marL="342900" indent="-342900">
-              <a:spcAft>
-                <a:spcPts val="1000"/>
-              </a:spcAft>
-              <a:buSzPct val="100000"/>
-              <a:buChar char="•"/>
-            </a:pPr>
-            <a:r>
-              <a:rPr lang="en-US" sz="2000" dirty="0">
-                <a:solidFill>
-                  <a:srgbClr val="F4E6C1"/>
-                </a:solidFill>
-                <a:latin typeface="Georgia" pitchFamily="34" charset="0"/>
-                <a:ea typeface="Georgia" pitchFamily="34" charset="-122"/>
-                <a:cs typeface="Georgia" pitchFamily="34" charset="-120"/>
-              </a:rPr>
-              <a:t>Moral counsel with the band before the last riders</a:t>
+              <a:t>1. Ali Kishi is blinded for telling the truth about the colt Kırat</a:t>
+            </a:r>
+            <a:endParaRPr lang="en-US" sz="2000" dirty="0"/>
+          </a:p>
+          <a:p>
+            <a:pPr marL="342900" indent="-342900">
+              <a:spcAft>
+                <a:spcPts val="1000"/>
+              </a:spcAft>
+              <a:buSzPct val="100000"/>
+              <a:buChar char="•"/>
+            </a:pPr>
+            <a:r>
+              <a:rPr lang="en-US" sz="2000" dirty="0">
+                <a:solidFill>
+                  <a:srgbClr val="F4E6C1"/>
+                </a:solidFill>
+                <a:latin typeface="Georgia" pitchFamily="34" charset="0"/>
+                <a:ea typeface="Georgia" pitchFamily="34" charset="-122"/>
+                <a:cs typeface="Georgia" pitchFamily="34" charset="-120"/>
+              </a:rPr>
+              <a:t>2. Recruit ally minds: Deli Hasan, Ayvaz</a:t>
+            </a:r>
+            <a:endParaRPr lang="en-US" sz="2000" dirty="0"/>
+          </a:p>
+          <a:p>
+            <a:pPr marL="342900" indent="-342900">
+              <a:spcAft>
+                <a:spcPts val="1000"/>
+              </a:spcAft>
+              <a:buSzPct val="100000"/>
+              <a:buChar char="•"/>
+            </a:pPr>
+            <a:r>
+              <a:rPr lang="en-US" sz="2000" dirty="0">
+                <a:solidFill>
+                  <a:srgbClr val="F4E6C1"/>
+                </a:solidFill>
+                <a:latin typeface="Georgia" pitchFamily="34" charset="0"/>
+                <a:ea typeface="Georgia" pitchFamily="34" charset="-122"/>
+                <a:cs typeface="Georgia" pitchFamily="34" charset="-120"/>
+              </a:rPr>
+              <a:t>3. Mounted combat: saber and verse against Bolu Bey’s riders</a:t>
+            </a:r>
+            <a:endParaRPr lang="en-US" sz="2000" dirty="0"/>
+          </a:p>
+          <a:p>
+            <a:pPr marL="342900" indent="-342900">
+              <a:spcAft>
+                <a:spcPts val="1000"/>
+              </a:spcAft>
+              <a:buSzPct val="100000"/>
+              <a:buChar char="•"/>
+            </a:pPr>
+            <a:r>
+              <a:rPr lang="en-US" sz="2000" dirty="0">
+                <a:solidFill>
+                  <a:srgbClr val="F4E6C1"/>
+                </a:solidFill>
+                <a:latin typeface="Georgia" pitchFamily="34" charset="0"/>
+                <a:ea typeface="Georgia" pitchFamily="34" charset="-122"/>
+                <a:cs typeface="Georgia" pitchFamily="34" charset="-120"/>
+              </a:rPr>
+              <a:t>4. Rescue Nigar from the captain</a:t>
+            </a:r>
+            <a:endParaRPr lang="en-US" sz="2000" dirty="0"/>
+          </a:p>
+          <a:p>
+            <a:pPr marL="342900" indent="-342900">
+              <a:spcAft>
+                <a:spcPts val="1000"/>
+              </a:spcAft>
+              <a:buSzPct val="100000"/>
+              <a:buChar char="•"/>
+            </a:pPr>
+            <a:r>
+              <a:rPr lang="en-US" sz="2000" dirty="0">
+                <a:solidFill>
+                  <a:srgbClr val="F4E6C1"/>
+                </a:solidFill>
+                <a:latin typeface="Georgia" pitchFamily="34" charset="0"/>
+                <a:ea typeface="Georgia" pitchFamily="34" charset="-122"/>
+                <a:cs typeface="Georgia" pitchFamily="34" charset="-120"/>
+              </a:rPr>
+              <a:t>5. Capture Çamlıbel as a home for the just — not a trophy</a:t>
             </a:r>
             <a:endParaRPr lang="en-US" sz="2000" dirty="0"/>
           </a:p>
@@ -3068,7 +3369,7 @@
                 <a:ea typeface="Georgia" pitchFamily="34" charset="-122"/>
                 <a:cs typeface="Georgia" pitchFamily="34" charset="-120"/>
               </a:rPr>
-              <a:t>AI in this build</a:t>
+              <a:t>Signature mechanics</a:t>
             </a:r>
             <a:endParaRPr lang="en-US" sz="3600" dirty="0"/>
           </a:p>
@@ -3107,7 +3408,7 @@
                 <a:ea typeface="Georgia" pitchFamily="34" charset="-122"/>
                 <a:cs typeface="Georgia" pitchFamily="34" charset="-120"/>
               </a:rPr>
-              <a:t>Reactive agents, not a cutscene</a:t>
+              <a:t>What makes this Koroglu, not a generic horse fighter</a:t>
             </a:r>
             <a:endParaRPr lang="en-US" sz="1800" dirty="0"/>
           </a:p>
@@ -3150,91 +3451,91 @@
                 <a:ea typeface="Georgia" pitchFamily="34" charset="-122"/>
                 <a:cs typeface="Georgia" pitchFamily="34" charset="-120"/>
               </a:rPr>
-              <a:t>Ally AI: Deli Hasan and Ayvaz fight at your shoulder</a:t>
-            </a:r>
-            <a:endParaRPr lang="en-US" sz="2000" dirty="0"/>
-          </a:p>
-          <a:p>
-            <a:pPr marL="342900" indent="-342900">
-              <a:spcAft>
-                <a:spcPts val="1000"/>
-              </a:spcAft>
-              <a:buSzPct val="100000"/>
-              <a:buChar char="•"/>
-            </a:pPr>
-            <a:r>
-              <a:rPr lang="en-US" sz="2000" dirty="0">
-                <a:solidFill>
-                  <a:srgbClr val="F4E6C1"/>
-                </a:solidFill>
-                <a:latin typeface="Georgia" pitchFamily="34" charset="0"/>
-                <a:ea typeface="Georgia" pitchFamily="34" charset="-122"/>
-                <a:cs typeface="Georgia" pitchFamily="34" charset="-120"/>
-              </a:rPr>
-              <a:t>Enemy AI: tax riders, sergeant, captain, last keep riders</a:t>
-            </a:r>
-            <a:endParaRPr lang="en-US" sz="2000" dirty="0"/>
-          </a:p>
-          <a:p>
-            <a:pPr marL="342900" indent="-342900">
-              <a:spcAft>
-                <a:spcPts val="1000"/>
-              </a:spcAft>
-              <a:buSzPct val="100000"/>
-              <a:buChar char="•"/>
-            </a:pPr>
-            <a:r>
-              <a:rPr lang="en-US" sz="2000" dirty="0">
-                <a:solidFill>
-                  <a:srgbClr val="F4E6C1"/>
-                </a:solidFill>
-                <a:latin typeface="Georgia" pitchFamily="34" charset="0"/>
-                <a:ea typeface="Georgia" pitchFamily="34" charset="-122"/>
-                <a:cs typeface="Georgia" pitchFamily="34" charset="-120"/>
-              </a:rPr>
-              <a:t>Adaptive pressure: verse slows them; they close when you linger</a:t>
-            </a:r>
-            <a:endParaRPr lang="en-US" sz="2000" dirty="0"/>
-          </a:p>
-          <a:p>
-            <a:pPr marL="342900" indent="-342900">
-              <a:spcAft>
-                <a:spcPts val="1000"/>
-              </a:spcAft>
-              <a:buSzPct val="100000"/>
-              <a:buChar char="•"/>
-            </a:pPr>
-            <a:r>
-              <a:rPr lang="en-US" sz="2000" dirty="0">
-                <a:solidFill>
-                  <a:srgbClr val="F4E6C1"/>
-                </a:solidFill>
-                <a:latin typeface="Georgia" pitchFamily="34" charset="0"/>
-                <a:ea typeface="Georgia" pitchFamily="34" charset="-122"/>
-                <a:cs typeface="Georgia" pitchFamily="34" charset="-120"/>
-              </a:rPr>
-              <a:t>Dialogue trees after Nigar is free: justice vs revenge flags</a:t>
-            </a:r>
-            <a:endParaRPr lang="en-US" sz="2000" dirty="0"/>
-          </a:p>
-          <a:p>
-            <a:pPr marL="342900" indent="-342900">
-              <a:spcAft>
-                <a:spcPts val="1000"/>
-              </a:spcAft>
-              <a:buSzPct val="100000"/>
-              <a:buChar char="•"/>
-            </a:pPr>
-            <a:r>
-              <a:rPr lang="en-US" sz="2000" dirty="0">
-                <a:solidFill>
-                  <a:srgbClr val="F4E6C1"/>
-                </a:solidFill>
-                <a:latin typeface="Georgia" pitchFamily="34" charset="0"/>
-                <a:ea typeface="Georgia" pitchFamily="34" charset="-122"/>
-                <a:cs typeface="Georgia" pitchFamily="34" charset="-120"/>
-              </a:rPr>
-              <a:t>Quest shape: your words change how the keep is remembered</a:t>
+              <a:t>Mounted riding in a valley (click or Ride N / W / S / E)</a:t>
+            </a:r>
+            <a:endParaRPr lang="en-US" sz="2000" dirty="0"/>
+          </a:p>
+          <a:p>
+            <a:pPr marL="342900" indent="-342900">
+              <a:spcAft>
+                <a:spcPts val="1000"/>
+              </a:spcAft>
+              <a:buSzPct val="100000"/>
+              <a:buChar char="•"/>
+            </a:pPr>
+            <a:r>
+              <a:rPr lang="en-US" sz="2000" dirty="0">
+                <a:solidFill>
+                  <a:srgbClr val="F4E6C1"/>
+                </a:solidFill>
+                <a:latin typeface="Georgia" pitchFamily="34" charset="0"/>
+                <a:ea typeface="Georgia" pitchFamily="34" charset="-122"/>
+                <a:cs typeface="Georgia" pitchFamily="34" charset="-120"/>
+              </a:rPr>
+              <a:t>Sword combat with hit timing</a:t>
+            </a:r>
+            <a:endParaRPr lang="en-US" sz="2000" dirty="0"/>
+          </a:p>
+          <a:p>
+            <a:pPr marL="342900" indent="-342900">
+              <a:spcAft>
+                <a:spcPts val="1000"/>
+              </a:spcAft>
+              <a:buSzPct val="100000"/>
+              <a:buChar char="•"/>
+            </a:pPr>
+            <a:r>
+              <a:rPr lang="en-US" sz="2000" dirty="0">
+                <a:solidFill>
+                  <a:srgbClr val="F4E6C1"/>
+                </a:solidFill>
+                <a:latin typeface="Georgia" pitchFamily="34" charset="0"/>
+                <a:ea typeface="Georgia" pitchFamily="34" charset="-122"/>
+                <a:cs typeface="Georgia" pitchFamily="34" charset="-120"/>
+              </a:rPr>
+              <a:t>Poetry combat: recited verses demoralize enemies</a:t>
+            </a:r>
+            <a:endParaRPr lang="en-US" sz="2000" dirty="0"/>
+          </a:p>
+          <a:p>
+            <a:pPr marL="342900" indent="-342900">
+              <a:spcAft>
+                <a:spcPts val="1000"/>
+              </a:spcAft>
+              <a:buSzPct val="100000"/>
+              <a:buChar char="•"/>
+            </a:pPr>
+            <a:r>
+              <a:rPr lang="en-US" sz="2000" dirty="0">
+                <a:solidFill>
+                  <a:srgbClr val="F4E6C1"/>
+                </a:solidFill>
+                <a:latin typeface="Georgia" pitchFamily="34" charset="0"/>
+                <a:ea typeface="Georgia" pitchFamily="34" charset="-122"/>
+                <a:cs typeface="Georgia" pitchFamily="34" charset="-120"/>
+              </a:rPr>
+              <a:t>Ashik saz heals those who stand with song</a:t>
+            </a:r>
+            <a:endParaRPr lang="en-US" sz="2000" dirty="0"/>
+          </a:p>
+          <a:p>
+            <a:pPr marL="342900" indent="-342900">
+              <a:spcAft>
+                <a:spcPts val="1000"/>
+              </a:spcAft>
+              <a:buSzPct val="100000"/>
+              <a:buChar char="•"/>
+            </a:pPr>
+            <a:r>
+              <a:rPr lang="en-US" sz="2000" dirty="0">
+                <a:solidFill>
+                  <a:srgbClr val="F4E6C1"/>
+                </a:solidFill>
+                <a:latin typeface="Georgia" pitchFamily="34" charset="0"/>
+                <a:ea typeface="Georgia" pitchFamily="34" charset="-122"/>
+                <a:cs typeface="Georgia" pitchFamily="34" charset="-120"/>
+              </a:rPr>
+              <a:t>Moral counsel with the band before the last riders</a:t>
             </a:r>
             <a:endParaRPr lang="en-US" sz="2000" dirty="0"/>
           </a:p>
@@ -3305,7 +3606,7 @@
                 <a:ea typeface="Georgia" pitchFamily="34" charset="-122"/>
                 <a:cs typeface="Georgia" pitchFamily="34" charset="-120"/>
               </a:rPr>
-              <a:t>Two-minute playthrough</a:t>
+              <a:t>AI in this build</a:t>
             </a:r>
             <a:endParaRPr lang="en-US" sz="3600" dirty="0"/>
           </a:p>
@@ -3344,7 +3645,7 @@
                 <a:ea typeface="Georgia" pitchFamily="34" charset="-122"/>
                 <a:cs typeface="Georgia" pitchFamily="34" charset="-120"/>
               </a:rPr>
-              <a:t>Record the live game — public/koroglu-two-minute-playthrough.webm</a:t>
+              <a:t>Reactive agents, not a cutscene</a:t>
             </a:r>
             <a:endParaRPr lang="en-US" sz="1800" dirty="0"/>
           </a:p>
@@ -3387,91 +3688,91 @@
                 <a:ea typeface="Georgia" pitchFamily="34" charset="-122"/>
                 <a:cs typeface="Georgia" pitchFamily="34" charset="-120"/>
               </a:rPr>
-              <a:t>0:00 Opening cards: Ali Kishi blinded; you are Koroglu</a:t>
-            </a:r>
-            <a:endParaRPr lang="en-US" sz="2000" dirty="0"/>
-          </a:p>
-          <a:p>
-            <a:pPr marL="342900" indent="-342900">
-              <a:spcAft>
-                <a:spcPts val="1000"/>
-              </a:spcAft>
-              <a:buSzPct val="100000"/>
-              <a:buChar char="•"/>
-            </a:pPr>
-            <a:r>
-              <a:rPr lang="en-US" sz="2000" dirty="0">
-                <a:solidFill>
-                  <a:srgbClr val="F4E6C1"/>
-                </a:solidFill>
-                <a:latin typeface="Georgia" pitchFamily="34" charset="0"/>
-                <a:ea typeface="Georgia" pitchFamily="34" charset="-122"/>
-                <a:cs typeface="Georgia" pitchFamily="34" charset="-120"/>
-              </a:rPr>
-              <a:t>0:06 Hear the father; stand by the ashik (heal); one Verse</a:t>
-            </a:r>
-            <a:endParaRPr lang="en-US" sz="2000" dirty="0"/>
-          </a:p>
-          <a:p>
-            <a:pPr marL="342900" indent="-342900">
-              <a:spcAft>
-                <a:spcPts val="1000"/>
-              </a:spcAft>
-              <a:buSzPct val="100000"/>
-              <a:buChar char="•"/>
-            </a:pPr>
-            <a:r>
-              <a:rPr lang="en-US" sz="2000" dirty="0">
-                <a:solidFill>
-                  <a:srgbClr val="F4E6C1"/>
-                </a:solidFill>
-                <a:latin typeface="Georgia" pitchFamily="34" charset="0"/>
-                <a:ea typeface="Georgia" pitchFamily="34" charset="-122"/>
-                <a:cs typeface="Georgia" pitchFamily="34" charset="-120"/>
-              </a:rPr>
-              <a:t>0:20 Drive tax riders, then gather Ayvaz and Deli Hasan</a:t>
-            </a:r>
-            <a:endParaRPr lang="en-US" sz="2000" dirty="0"/>
-          </a:p>
-          <a:p>
-            <a:pPr marL="342900" indent="-342900">
-              <a:spcAft>
-                <a:spcPts val="1000"/>
-              </a:spcAft>
-              <a:buSzPct val="100000"/>
-              <a:buChar char="•"/>
-            </a:pPr>
-            <a:r>
-              <a:rPr lang="en-US" sz="2000" dirty="0">
-                <a:solidFill>
-                  <a:srgbClr val="F4E6C1"/>
-                </a:solidFill>
-                <a:latin typeface="Georgia" pitchFamily="34" charset="0"/>
-                <a:ea typeface="Georgia" pitchFamily="34" charset="-122"/>
-                <a:cs typeface="Georgia" pitchFamily="34" charset="-120"/>
-              </a:rPr>
-              <a:t>1:20 Captain falls; Nigar walks; kindness is also courage</a:t>
-            </a:r>
-            <a:endParaRPr lang="en-US" sz="2000" dirty="0"/>
-          </a:p>
-          <a:p>
-            <a:pPr marL="342900" indent="-342900">
-              <a:spcAft>
-                <a:spcPts val="1000"/>
-              </a:spcAft>
-              <a:buSzPct val="100000"/>
-              <a:buChar char="•"/>
-            </a:pPr>
-            <a:r>
-              <a:rPr lang="en-US" sz="2000" dirty="0">
-                <a:solidFill>
-                  <a:srgbClr val="F4E6C1"/>
-                </a:solidFill>
-                <a:latin typeface="Georgia" pitchFamily="34" charset="0"/>
-                <a:ea typeface="Georgia" pitchFamily="34" charset="-122"/>
-                <a:cs typeface="Georgia" pitchFamily="34" charset="-120"/>
-              </a:rPr>
-              <a:t>1:45 Green gate, hug, Speak with Nigar — good ending</a:t>
+              <a:t>Ally AI: Deli Hasan and Ayvaz fight at your shoulder</a:t>
+            </a:r>
+            <a:endParaRPr lang="en-US" sz="2000" dirty="0"/>
+          </a:p>
+          <a:p>
+            <a:pPr marL="342900" indent="-342900">
+              <a:spcAft>
+                <a:spcPts val="1000"/>
+              </a:spcAft>
+              <a:buSzPct val="100000"/>
+              <a:buChar char="•"/>
+            </a:pPr>
+            <a:r>
+              <a:rPr lang="en-US" sz="2000" dirty="0">
+                <a:solidFill>
+                  <a:srgbClr val="F4E6C1"/>
+                </a:solidFill>
+                <a:latin typeface="Georgia" pitchFamily="34" charset="0"/>
+                <a:ea typeface="Georgia" pitchFamily="34" charset="-122"/>
+                <a:cs typeface="Georgia" pitchFamily="34" charset="-120"/>
+              </a:rPr>
+              <a:t>Enemy AI: tax riders, sergeant, captain, last keep riders</a:t>
+            </a:r>
+            <a:endParaRPr lang="en-US" sz="2000" dirty="0"/>
+          </a:p>
+          <a:p>
+            <a:pPr marL="342900" indent="-342900">
+              <a:spcAft>
+                <a:spcPts val="1000"/>
+              </a:spcAft>
+              <a:buSzPct val="100000"/>
+              <a:buChar char="•"/>
+            </a:pPr>
+            <a:r>
+              <a:rPr lang="en-US" sz="2000" dirty="0">
+                <a:solidFill>
+                  <a:srgbClr val="F4E6C1"/>
+                </a:solidFill>
+                <a:latin typeface="Georgia" pitchFamily="34" charset="0"/>
+                <a:ea typeface="Georgia" pitchFamily="34" charset="-122"/>
+                <a:cs typeface="Georgia" pitchFamily="34" charset="-120"/>
+              </a:rPr>
+              <a:t>Adaptive pressure: verse slows them; they close when you linger</a:t>
+            </a:r>
+            <a:endParaRPr lang="en-US" sz="2000" dirty="0"/>
+          </a:p>
+          <a:p>
+            <a:pPr marL="342900" indent="-342900">
+              <a:spcAft>
+                <a:spcPts val="1000"/>
+              </a:spcAft>
+              <a:buSzPct val="100000"/>
+              <a:buChar char="•"/>
+            </a:pPr>
+            <a:r>
+              <a:rPr lang="en-US" sz="2000" dirty="0">
+                <a:solidFill>
+                  <a:srgbClr val="F4E6C1"/>
+                </a:solidFill>
+                <a:latin typeface="Georgia" pitchFamily="34" charset="0"/>
+                <a:ea typeface="Georgia" pitchFamily="34" charset="-122"/>
+                <a:cs typeface="Georgia" pitchFamily="34" charset="-120"/>
+              </a:rPr>
+              <a:t>Dialogue trees after Nigar is free: justice vs revenge flags</a:t>
+            </a:r>
+            <a:endParaRPr lang="en-US" sz="2000" dirty="0"/>
+          </a:p>
+          <a:p>
+            <a:pPr marL="342900" indent="-342900">
+              <a:spcAft>
+                <a:spcPts val="1000"/>
+              </a:spcAft>
+              <a:buSzPct val="100000"/>
+              <a:buChar char="•"/>
+            </a:pPr>
+            <a:r>
+              <a:rPr lang="en-US" sz="2000" dirty="0">
+                <a:solidFill>
+                  <a:srgbClr val="F4E6C1"/>
+                </a:solidFill>
+                <a:latin typeface="Georgia" pitchFamily="34" charset="0"/>
+                <a:ea typeface="Georgia" pitchFamily="34" charset="-122"/>
+                <a:cs typeface="Georgia" pitchFamily="34" charset="-120"/>
+              </a:rPr>
+              <a:t>Quest shape: your words change how the keep is remembered</a:t>
             </a:r>
             <a:endParaRPr lang="en-US" sz="2000" dirty="0"/>
           </a:p>
@@ -3542,7 +3843,7 @@
                 <a:ea typeface="Georgia" pitchFamily="34" charset="-122"/>
                 <a:cs typeface="Georgia" pitchFamily="34" charset="-120"/>
               </a:rPr>
-              <a:t>Good ending with Nigar</a:t>
+              <a:t>Two-minute playthrough</a:t>
             </a:r>
             <a:endParaRPr lang="en-US" sz="3600" dirty="0"/>
           </a:p>
@@ -3581,7 +3882,7 @@
                 <a:ea typeface="Georgia" pitchFamily="34" charset="-122"/>
                 <a:cs typeface="Georgia" pitchFamily="34" charset="-120"/>
               </a:rPr>
-              <a:t>Love is not a trophy</a:t>
+              <a:t>Record the live game — public/koroglu-two-minute-playthrough.webm</a:t>
             </a:r>
             <a:endParaRPr lang="en-US" sz="1800" dirty="0"/>
           </a:p>
@@ -3624,91 +3925,91 @@
                 <a:ea typeface="Georgia" pitchFamily="34" charset="-122"/>
                 <a:cs typeface="Georgia" pitchFamily="34" charset="-120"/>
               </a:rPr>
-              <a:t>Win at the green gate: hug still, then Speak with Nigar</a:t>
-            </a:r>
-            <a:endParaRPr lang="en-US" sz="2000" dirty="0"/>
-          </a:p>
-          <a:p>
-            <a:pPr marL="342900" indent="-342900">
-              <a:spcAft>
-                <a:spcPts val="1000"/>
-              </a:spcAft>
-              <a:buSzPct val="100000"/>
-              <a:buChar char="•"/>
-            </a:pPr>
-            <a:r>
-              <a:rPr lang="en-US" sz="2000" dirty="0">
-                <a:solidFill>
-                  <a:srgbClr val="F4E6C1"/>
-                </a:solidFill>
-                <a:latin typeface="Georgia" pitchFamily="34" charset="0"/>
-                <a:ea typeface="Georgia" pitchFamily="34" charset="-122"/>
-                <a:cs typeface="Georgia" pitchFamily="34" charset="-120"/>
-              </a:rPr>
-              <a:t>She refuses to spend the hour as a rescued prize</a:t>
-            </a:r>
-            <a:endParaRPr lang="en-US" sz="2000" dirty="0"/>
-          </a:p>
-          <a:p>
-            <a:pPr marL="342900" indent="-342900">
-              <a:spcAft>
-                <a:spcPts val="1000"/>
-              </a:spcAft>
-              <a:buSzPct val="100000"/>
-              <a:buChar char="•"/>
-            </a:pPr>
-            <a:r>
-              <a:rPr lang="en-US" sz="2000" dirty="0">
-                <a:solidFill>
-                  <a:srgbClr val="F4E6C1"/>
-                </a:solidFill>
-                <a:latin typeface="Georgia" pitchFamily="34" charset="0"/>
-                <a:ea typeface="Georgia" pitchFamily="34" charset="-122"/>
-                <a:cs typeface="Georgia" pitchFamily="34" charset="-120"/>
-              </a:rPr>
-              <a:t>Koroglu answers as her equal — saber, verse, and love</a:t>
-            </a:r>
-            <a:endParaRPr lang="en-US" sz="2000" dirty="0"/>
-          </a:p>
-          <a:p>
-            <a:pPr marL="342900" indent="-342900">
-              <a:spcAft>
-                <a:spcPts val="1000"/>
-              </a:spcAft>
-              <a:buSzPct val="100000"/>
-              <a:buChar char="•"/>
-            </a:pPr>
-            <a:r>
-              <a:rPr lang="en-US" sz="2000" dirty="0">
-                <a:solidFill>
-                  <a:srgbClr val="F4E6C1"/>
-                </a:solidFill>
-                <a:latin typeface="Georgia" pitchFamily="34" charset="0"/>
-                <a:ea typeface="Georgia" pitchFamily="34" charset="-122"/>
-                <a:cs typeface="Georgia" pitchFamily="34" charset="-120"/>
-              </a:rPr>
-              <a:t>Closing card: Good ending — Çamlıbel is a home again</a:t>
-            </a:r>
-            <a:endParaRPr lang="en-US" sz="2000" dirty="0"/>
-          </a:p>
-          <a:p>
-            <a:pPr marL="342900" indent="-342900">
-              <a:spcAft>
-                <a:spcPts val="1000"/>
-              </a:spcAft>
-              <a:buSzPct val="100000"/>
-              <a:buChar char="•"/>
-            </a:pPr>
-            <a:r>
-              <a:rPr lang="en-US" sz="2000" dirty="0">
-                <a:solidFill>
-                  <a:srgbClr val="F4E6C1"/>
-                </a:solidFill>
-                <a:latin typeface="Georgia" pitchFamily="34" charset="0"/>
-                <a:ea typeface="Georgia" pitchFamily="34" charset="-122"/>
-                <a:cs typeface="Georgia" pitchFamily="34" charset="-120"/>
-              </a:rPr>
-              <a:t>The dastan remembers steel and this quiet at the gate</a:t>
+              <a:t>0:00 Opening cards: Ali Kishi blinded; you are Koroglu</a:t>
+            </a:r>
+            <a:endParaRPr lang="en-US" sz="2000" dirty="0"/>
+          </a:p>
+          <a:p>
+            <a:pPr marL="342900" indent="-342900">
+              <a:spcAft>
+                <a:spcPts val="1000"/>
+              </a:spcAft>
+              <a:buSzPct val="100000"/>
+              <a:buChar char="•"/>
+            </a:pPr>
+            <a:r>
+              <a:rPr lang="en-US" sz="2000" dirty="0">
+                <a:solidFill>
+                  <a:srgbClr val="F4E6C1"/>
+                </a:solidFill>
+                <a:latin typeface="Georgia" pitchFamily="34" charset="0"/>
+                <a:ea typeface="Georgia" pitchFamily="34" charset="-122"/>
+                <a:cs typeface="Georgia" pitchFamily="34" charset="-120"/>
+              </a:rPr>
+              <a:t>0:06 Hear the father; stand by the ashik (heal); one Verse</a:t>
+            </a:r>
+            <a:endParaRPr lang="en-US" sz="2000" dirty="0"/>
+          </a:p>
+          <a:p>
+            <a:pPr marL="342900" indent="-342900">
+              <a:spcAft>
+                <a:spcPts val="1000"/>
+              </a:spcAft>
+              <a:buSzPct val="100000"/>
+              <a:buChar char="•"/>
+            </a:pPr>
+            <a:r>
+              <a:rPr lang="en-US" sz="2000" dirty="0">
+                <a:solidFill>
+                  <a:srgbClr val="F4E6C1"/>
+                </a:solidFill>
+                <a:latin typeface="Georgia" pitchFamily="34" charset="0"/>
+                <a:ea typeface="Georgia" pitchFamily="34" charset="-122"/>
+                <a:cs typeface="Georgia" pitchFamily="34" charset="-120"/>
+              </a:rPr>
+              <a:t>0:20 Drive tax riders, then gather Ayvaz and Deli Hasan</a:t>
+            </a:r>
+            <a:endParaRPr lang="en-US" sz="2000" dirty="0"/>
+          </a:p>
+          <a:p>
+            <a:pPr marL="342900" indent="-342900">
+              <a:spcAft>
+                <a:spcPts val="1000"/>
+              </a:spcAft>
+              <a:buSzPct val="100000"/>
+              <a:buChar char="•"/>
+            </a:pPr>
+            <a:r>
+              <a:rPr lang="en-US" sz="2000" dirty="0">
+                <a:solidFill>
+                  <a:srgbClr val="F4E6C1"/>
+                </a:solidFill>
+                <a:latin typeface="Georgia" pitchFamily="34" charset="0"/>
+                <a:ea typeface="Georgia" pitchFamily="34" charset="-122"/>
+                <a:cs typeface="Georgia" pitchFamily="34" charset="-120"/>
+              </a:rPr>
+              <a:t>1:20 Captain falls; Nigar walks; kindness is also courage</a:t>
+            </a:r>
+            <a:endParaRPr lang="en-US" sz="2000" dirty="0"/>
+          </a:p>
+          <a:p>
+            <a:pPr marL="342900" indent="-342900">
+              <a:spcAft>
+                <a:spcPts val="1000"/>
+              </a:spcAft>
+              <a:buSzPct val="100000"/>
+              <a:buChar char="•"/>
+            </a:pPr>
+            <a:r>
+              <a:rPr lang="en-US" sz="2000" dirty="0">
+                <a:solidFill>
+                  <a:srgbClr val="F4E6C1"/>
+                </a:solidFill>
+                <a:latin typeface="Georgia" pitchFamily="34" charset="0"/>
+                <a:ea typeface="Georgia" pitchFamily="34" charset="-122"/>
+                <a:cs typeface="Georgia" pitchFamily="34" charset="-120"/>
+              </a:rPr>
+              <a:t>1:45 Green gate, hug, Speak with Nigar — good ending</a:t>
             </a:r>
             <a:endParaRPr lang="en-US" sz="2000" dirty="0"/>
           </a:p>
@@ -3779,7 +4080,7 @@
                 <a:ea typeface="Georgia" pitchFamily="34" charset="-122"/>
                 <a:cs typeface="Georgia" pitchFamily="34" charset="-120"/>
               </a:rPr>
-              <a:t>What to judge</a:t>
+              <a:t>Good ending with Nigar</a:t>
             </a:r>
             <a:endParaRPr lang="en-US" sz="3600" dirty="0"/>
           </a:p>
@@ -3818,7 +4119,7 @@
                 <a:ea typeface="Georgia" pitchFamily="34" charset="-122"/>
                 <a:cs typeface="Georgia" pitchFamily="34" charset="-120"/>
               </a:rPr>
-              <a:t>Priority when features conflict</a:t>
+              <a:t>Love is not a trophy</a:t>
             </a:r>
             <a:endParaRPr lang="en-US" sz="1800" dirty="0"/>
           </a:p>
@@ -3861,91 +4162,91 @@
                 <a:ea typeface="Georgia" pitchFamily="34" charset="-122"/>
                 <a:cs typeface="Georgia" pitchFamily="34" charset="-120"/>
               </a:rPr>
-              <a:t>Cultural authenticity first</a:t>
-            </a:r>
-            <a:endParaRPr lang="en-US" sz="2000" dirty="0"/>
-          </a:p>
-          <a:p>
-            <a:pPr marL="342900" indent="-342900">
-              <a:spcAft>
-                <a:spcPts val="1000"/>
-              </a:spcAft>
-              <a:buSzPct val="100000"/>
-              <a:buChar char="•"/>
-            </a:pPr>
-            <a:r>
-              <a:rPr lang="en-US" sz="2000" dirty="0">
-                <a:solidFill>
-                  <a:srgbClr val="F4E6C1"/>
-                </a:solidFill>
-                <a:latin typeface="Georgia" pitchFamily="34" charset="0"/>
-                <a:ea typeface="Georgia" pitchFamily="34" charset="-122"/>
-                <a:cs typeface="Georgia" pitchFamily="34" charset="-120"/>
-              </a:rPr>
-              <a:t>Then a playable combat and AI loop</a:t>
-            </a:r>
-            <a:endParaRPr lang="en-US" sz="2000" dirty="0"/>
-          </a:p>
-          <a:p>
-            <a:pPr marL="342900" indent="-342900">
-              <a:spcAft>
-                <a:spcPts val="1000"/>
-              </a:spcAft>
-              <a:buSzPct val="100000"/>
-              <a:buChar char="•"/>
-            </a:pPr>
-            <a:r>
-              <a:rPr lang="en-US" sz="2000" dirty="0">
-                <a:solidFill>
-                  <a:srgbClr val="F4E6C1"/>
-                </a:solidFill>
-                <a:latin typeface="Georgia" pitchFamily="34" charset="0"/>
-                <a:ea typeface="Georgia" pitchFamily="34" charset="-122"/>
-                <a:cs typeface="Georgia" pitchFamily="34" charset="-120"/>
-              </a:rPr>
-              <a:t>Then generative / branching narrative</a:t>
-            </a:r>
-            <a:endParaRPr lang="en-US" sz="2000" dirty="0"/>
-          </a:p>
-          <a:p>
-            <a:pPr marL="342900" indent="-342900">
-              <a:spcAft>
-                <a:spcPts val="1000"/>
-              </a:spcAft>
-              <a:buSzPct val="100000"/>
-              <a:buChar char="•"/>
-            </a:pPr>
-            <a:r>
-              <a:rPr lang="en-US" sz="2000" dirty="0">
-                <a:solidFill>
-                  <a:srgbClr val="F4E6C1"/>
-                </a:solidFill>
-                <a:latin typeface="Georgia" pitchFamily="34" charset="0"/>
-                <a:ea typeface="Georgia" pitchFamily="34" charset="-122"/>
-                <a:cs typeface="Georgia" pitchFamily="34" charset="-120"/>
-              </a:rPr>
-              <a:t>Then polish</a:t>
-            </a:r>
-            <a:endParaRPr lang="en-US" sz="2000" dirty="0"/>
-          </a:p>
-          <a:p>
-            <a:pPr marL="342900" indent="-342900">
-              <a:spcAft>
-                <a:spcPts val="1000"/>
-              </a:spcAft>
-              <a:buSzPct val="100000"/>
-              <a:buChar char="•"/>
-            </a:pPr>
-            <a:r>
-              <a:rPr lang="en-US" sz="2000" dirty="0">
-                <a:solidFill>
-                  <a:srgbClr val="F4E6C1"/>
-                </a:solidFill>
-                <a:latin typeface="Georgia" pitchFamily="34" charset="0"/>
-                <a:ea typeface="Georgia" pitchFamily="34" charset="-122"/>
-                <a:cs typeface="Georgia" pitchFamily="34" charset="-120"/>
-              </a:rPr>
-              <a:t>This prototype proves the loop in a few minutes of play</a:t>
+              <a:t>Win at the green gate: hug still, then Speak with Nigar</a:t>
+            </a:r>
+            <a:endParaRPr lang="en-US" sz="2000" dirty="0"/>
+          </a:p>
+          <a:p>
+            <a:pPr marL="342900" indent="-342900">
+              <a:spcAft>
+                <a:spcPts val="1000"/>
+              </a:spcAft>
+              <a:buSzPct val="100000"/>
+              <a:buChar char="•"/>
+            </a:pPr>
+            <a:r>
+              <a:rPr lang="en-US" sz="2000" dirty="0">
+                <a:solidFill>
+                  <a:srgbClr val="F4E6C1"/>
+                </a:solidFill>
+                <a:latin typeface="Georgia" pitchFamily="34" charset="0"/>
+                <a:ea typeface="Georgia" pitchFamily="34" charset="-122"/>
+                <a:cs typeface="Georgia" pitchFamily="34" charset="-120"/>
+              </a:rPr>
+              <a:t>She refuses to spend the hour as a rescued prize</a:t>
+            </a:r>
+            <a:endParaRPr lang="en-US" sz="2000" dirty="0"/>
+          </a:p>
+          <a:p>
+            <a:pPr marL="342900" indent="-342900">
+              <a:spcAft>
+                <a:spcPts val="1000"/>
+              </a:spcAft>
+              <a:buSzPct val="100000"/>
+              <a:buChar char="•"/>
+            </a:pPr>
+            <a:r>
+              <a:rPr lang="en-US" sz="2000" dirty="0">
+                <a:solidFill>
+                  <a:srgbClr val="F4E6C1"/>
+                </a:solidFill>
+                <a:latin typeface="Georgia" pitchFamily="34" charset="0"/>
+                <a:ea typeface="Georgia" pitchFamily="34" charset="-122"/>
+                <a:cs typeface="Georgia" pitchFamily="34" charset="-120"/>
+              </a:rPr>
+              <a:t>Koroglu answers as her equal — saber, verse, and love</a:t>
+            </a:r>
+            <a:endParaRPr lang="en-US" sz="2000" dirty="0"/>
+          </a:p>
+          <a:p>
+            <a:pPr marL="342900" indent="-342900">
+              <a:spcAft>
+                <a:spcPts val="1000"/>
+              </a:spcAft>
+              <a:buSzPct val="100000"/>
+              <a:buChar char="•"/>
+            </a:pPr>
+            <a:r>
+              <a:rPr lang="en-US" sz="2000" dirty="0">
+                <a:solidFill>
+                  <a:srgbClr val="F4E6C1"/>
+                </a:solidFill>
+                <a:latin typeface="Georgia" pitchFamily="34" charset="0"/>
+                <a:ea typeface="Georgia" pitchFamily="34" charset="-122"/>
+                <a:cs typeface="Georgia" pitchFamily="34" charset="-120"/>
+              </a:rPr>
+              <a:t>Closing card: Good ending — Çamlıbel is a home again</a:t>
+            </a:r>
+            <a:endParaRPr lang="en-US" sz="2000" dirty="0"/>
+          </a:p>
+          <a:p>
+            <a:pPr marL="342900" indent="-342900">
+              <a:spcAft>
+                <a:spcPts val="1000"/>
+              </a:spcAft>
+              <a:buSzPct val="100000"/>
+              <a:buChar char="•"/>
+            </a:pPr>
+            <a:r>
+              <a:rPr lang="en-US" sz="2000" dirty="0">
+                <a:solidFill>
+                  <a:srgbClr val="F4E6C1"/>
+                </a:solidFill>
+                <a:latin typeface="Georgia" pitchFamily="34" charset="0"/>
+                <a:ea typeface="Georgia" pitchFamily="34" charset="-122"/>
+                <a:cs typeface="Georgia" pitchFamily="34" charset="-120"/>
+              </a:rPr>
+              <a:t>The dastan remembers steel and this quiet at the gate</a:t>
             </a:r>
             <a:endParaRPr lang="en-US" sz="2000" dirty="0"/>
           </a:p>

--- a/docs/Koroglu-Epic-Game.pptx
+++ b/docs/Koroglu-Epic-Game.pptx
@@ -16,9 +16,10 @@
     <p:sldId id="264" r:id="rId10"/>
     <p:sldId id="265" r:id="rId11"/>
     <p:sldId id="266" r:id="rId12"/>
+    <p:sldId id="267" r:id="rId13"/>
   </p:sldIdLst>
   <p:notesMasterIdLst>
-    <p:notesMasterId r:id="rId13"/>
+    <p:notesMasterId r:id="rId14"/>
   </p:notesMasterIdLst>
   <p:sldSz cx="12191695" cy="6858000"/>
   <p:notesSz cx="6858000" cy="12191695"/>
@@ -712,6 +713,94 @@
             <a:fld id="{F7021451-1387-4CA6-816F-3879F97B5CBC}" type="slidenum">
               <a:rPr lang="en-US"/>
               <a:t>11</a:t>
+            </a:fld>
+            <a:endParaRPr lang="en-US"/>
+          </a:p>
+        </p:txBody>
+      </p:sp>
+    </p:spTree>
+    <p:extLst>
+      <p:ext uri="{BB962C8B-B14F-4D97-AF65-F5344CB8AC3E}">
+        <p14:creationId xmlns:p14="http://schemas.microsoft.com/office/powerpoint/2010/main" val="1024086991"/>
+      </p:ext>
+    </p:extLst>
+  </p:cSld>
+  <p:clrMapOvr>
+    <a:masterClrMapping/>
+  </p:clrMapOvr>
+</p:notes>
+</file>
+
+<file path=ppt/notesSlides/notesSlide12.xml><?xml version="1.0" encoding="utf-8"?>
+<p:notes xmlns:a="http://schemas.openxmlformats.org/drawingml/2006/main" xmlns:r="http://schemas.openxmlformats.org/officeDocument/2006/relationships" xmlns:p="http://schemas.openxmlformats.org/presentationml/2006/main">
+  <p:cSld>
+    <p:spTree>
+      <p:nvGrpSpPr>
+        <p:cNvPr id="1" name=""/>
+        <p:cNvGrpSpPr/>
+        <p:nvPr/>
+      </p:nvGrpSpPr>
+      <p:grpSpPr>
+        <a:xfrm>
+          <a:off x="0" y="0"/>
+          <a:ext cx="0" cy="0"/>
+          <a:chOff x="0" y="0"/>
+          <a:chExt cx="0" cy="0"/>
+        </a:xfrm>
+      </p:grpSpPr>
+      <p:sp>
+        <p:nvSpPr>
+          <p:cNvPr id="2" name="Slide Image Placeholder 1"/>
+          <p:cNvSpPr>
+            <a:spLocks noGrp="1" noRot="1" noChangeAspect="1"/>
+          </p:cNvSpPr>
+          <p:nvPr>
+            <p:ph type="sldImg"/>
+          </p:nvPr>
+        </p:nvSpPr>
+        <p:spPr/>
+      </p:sp>
+      <p:sp>
+        <p:nvSpPr>
+          <p:cNvPr id="3" name="Notes Placeholder 2"/>
+          <p:cNvSpPr>
+            <a:spLocks noGrp="1"/>
+          </p:cNvSpPr>
+          <p:nvPr>
+            <p:ph type="body" idx="1"/>
+          </p:nvPr>
+        </p:nvSpPr>
+        <p:spPr/>
+        <p:txBody>
+          <a:bodyPr/>
+          <a:lstStyle/>
+          <a:p>
+            <a:r>
+              <a:rPr lang="en-US" dirty="0"/>
+              <a:t/>
+            </a:r>
+            <a:endParaRPr lang="en-US" dirty="0"/>
+          </a:p>
+        </p:txBody>
+      </p:sp>
+      <p:sp>
+        <p:nvSpPr>
+          <p:cNvPr id="4" name="Slide Number Placeholder 3"/>
+          <p:cNvSpPr>
+            <a:spLocks noGrp="1"/>
+          </p:cNvSpPr>
+          <p:nvPr>
+            <p:ph type="sldNum" sz="quarter" idx="10"/>
+          </p:nvPr>
+        </p:nvSpPr>
+        <p:spPr/>
+        <p:txBody>
+          <a:bodyPr/>
+          <a:lstStyle/>
+          <a:p>
+            <a:fld id="{F7021451-1387-4CA6-816F-3879F97B5CBC}" type="slidenum">
+              <a:rPr lang="en-US"/>
+              <a:t>12</a:t>
             </a:fld>
             <a:endParaRPr lang="en-US"/>
           </a:p>
@@ -2010,7 +2099,7 @@
                 <a:ea typeface="Georgia" pitchFamily="34" charset="-122"/>
                 <a:cs typeface="Georgia" pitchFamily="34" charset="-120"/>
               </a:rPr>
-              <a:t>What to judge</a:t>
+              <a:t>What we tested, and what broke</a:t>
             </a:r>
             <a:endParaRPr lang="en-US" sz="3600" dirty="0"/>
           </a:p>
@@ -2049,7 +2138,7 @@
                 <a:ea typeface="Georgia" pitchFamily="34" charset="-122"/>
                 <a:cs typeface="Georgia" pitchFamily="34" charset="-120"/>
               </a:rPr>
-              <a:t>Priority when features conflict</a:t>
+              <a:t>Honest failures score better than silence. No Jest — play tests, a 2-minute recording, shipping checks.</a:t>
             </a:r>
             <a:endParaRPr lang="en-US" sz="1800" dirty="0"/>
           </a:p>
@@ -2092,91 +2181,70 @@
                 <a:ea typeface="Georgia" pitchFamily="34" charset="-122"/>
                 <a:cs typeface="Georgia" pitchFamily="34" charset="-120"/>
               </a:rPr>
-              <a:t>Cultural authenticity first</a:t>
-            </a:r>
-            <a:endParaRPr lang="en-US" sz="2000" dirty="0"/>
-          </a:p>
-          <a:p>
-            <a:pPr marL="342900" indent="-342900">
-              <a:spcAft>
-                <a:spcPts val="1000"/>
-              </a:spcAft>
-              <a:buSzPct val="100000"/>
-              <a:buChar char="•"/>
-            </a:pPr>
-            <a:r>
-              <a:rPr lang="en-US" sz="2000" dirty="0">
-                <a:solidFill>
-                  <a:srgbClr val="F4E6C1"/>
-                </a:solidFill>
-                <a:latin typeface="Georgia" pitchFamily="34" charset="0"/>
-                <a:ea typeface="Georgia" pitchFamily="34" charset="-122"/>
-                <a:cs typeface="Georgia" pitchFamily="34" charset="-120"/>
-              </a:rPr>
-              <a:t>Then a playable combat and AI loop</a:t>
-            </a:r>
-            <a:endParaRPr lang="en-US" sz="2000" dirty="0"/>
-          </a:p>
-          <a:p>
-            <a:pPr marL="342900" indent="-342900">
-              <a:spcAft>
-                <a:spcPts val="1000"/>
-              </a:spcAft>
-              <a:buSzPct val="100000"/>
-              <a:buChar char="•"/>
-            </a:pPr>
-            <a:r>
-              <a:rPr lang="en-US" sz="2000" dirty="0">
-                <a:solidFill>
-                  <a:srgbClr val="F4E6C1"/>
-                </a:solidFill>
-                <a:latin typeface="Georgia" pitchFamily="34" charset="0"/>
-                <a:ea typeface="Georgia" pitchFamily="34" charset="-122"/>
-                <a:cs typeface="Georgia" pitchFamily="34" charset="-120"/>
-              </a:rPr>
-              <a:t>Then generative / branching narrative</a:t>
-            </a:r>
-            <a:endParaRPr lang="en-US" sz="2000" dirty="0"/>
-          </a:p>
-          <a:p>
-            <a:pPr marL="342900" indent="-342900">
-              <a:spcAft>
-                <a:spcPts val="1000"/>
-              </a:spcAft>
-              <a:buSzPct val="100000"/>
-              <a:buChar char="•"/>
-            </a:pPr>
-            <a:r>
-              <a:rPr lang="en-US" sz="2000" dirty="0">
-                <a:solidFill>
-                  <a:srgbClr val="F4E6C1"/>
-                </a:solidFill>
-                <a:latin typeface="Georgia" pitchFamily="34" charset="0"/>
-                <a:ea typeface="Georgia" pitchFamily="34" charset="-122"/>
-                <a:cs typeface="Georgia" pitchFamily="34" charset="-120"/>
-              </a:rPr>
-              <a:t>Then polish</a:t>
-            </a:r>
-            <a:endParaRPr lang="en-US" sz="2000" dirty="0"/>
-          </a:p>
-          <a:p>
-            <a:pPr marL="342900" indent="-342900">
-              <a:spcAft>
-                <a:spcPts val="1000"/>
-              </a:spcAft>
-              <a:buSzPct val="100000"/>
-              <a:buChar char="•"/>
-            </a:pPr>
-            <a:r>
-              <a:rPr lang="en-US" sz="2000" dirty="0">
-                <a:solidFill>
-                  <a:srgbClr val="F4E6C1"/>
-                </a:solidFill>
-                <a:latin typeface="Georgia" pitchFamily="34" charset="0"/>
-                <a:ea typeface="Georgia" pitchFamily="34" charset="-122"/>
-                <a:cs typeface="Georgia" pitchFamily="34" charset="-120"/>
-              </a:rPr>
-              <a:t>This prototype proves the loop in a few minutes of play</a:t>
+              <a:t>Tested: live loop on video; verse + ashik heal; ally join; Nigar counsel; GitHub webm; PowerPoint open.</a:t>
+            </a:r>
+            <a:endParaRPr lang="en-US" sz="2000" dirty="0"/>
+          </a:p>
+          <a:p>
+            <a:pPr marL="342900" indent="-342900">
+              <a:spcAft>
+                <a:spcPts val="1000"/>
+              </a:spcAft>
+              <a:buSzPct val="100000"/>
+              <a:buChar char="•"/>
+            </a:pPr>
+            <a:r>
+              <a:rPr lang="en-US" sz="2000" dirty="0">
+                <a:solidFill>
+                  <a:srgbClr val="F4E6C1"/>
+                </a:solidFill>
+                <a:latin typeface="Georgia" pitchFamily="34" charset="0"/>
+                <a:ea typeface="Georgia" pitchFamily="34" charset="-122"/>
+                <a:cs typeface="Georgia" pitchFamily="34" charset="-120"/>
+              </a:rPr>
+              <a:t>Broke: WebGL white-screen (now falls back to 2D). Hug ending with no Nigar voice (now Good ending talk). Video “missing” because main ≠ this branch. First .pptx XML would not open.</a:t>
+            </a:r>
+            <a:endParaRPr lang="en-US" sz="2000" dirty="0"/>
+          </a:p>
+          <a:p>
+            <a:pPr marL="342900" indent="-342900">
+              <a:spcAft>
+                <a:spcPts val="1000"/>
+              </a:spcAft>
+              <a:buSzPct val="100000"/>
+              <a:buChar char="•"/>
+            </a:pPr>
+            <a:r>
+              <a:rPr lang="en-US" sz="2000" dirty="0">
+                <a:solidFill>
+                  <a:srgbClr val="F4E6C1"/>
+                </a:solidFill>
+                <a:latin typeface="Georgia" pitchFamily="34" charset="0"/>
+                <a:ea typeface="Georgia" pitchFamily="34" charset="-122"/>
+                <a:cs typeface="Georgia" pitchFamily="34" charset="-120"/>
+              </a:rPr>
+              <a:t>Still broken: horses are boxes (not 50 Turkic models). No mounted archery. No live Azerbaijani/Turkmen LLM. Allies bunch — greedy moveToward, not a navmesh.</a:t>
+            </a:r>
+            <a:endParaRPr lang="en-US" sz="2000" dirty="0"/>
+          </a:p>
+          <a:p>
+            <a:pPr marL="342900" indent="-342900">
+              <a:spcAft>
+                <a:spcPts val="1000"/>
+              </a:spcAft>
+              <a:buSzPct val="100000"/>
+              <a:buChar char="•"/>
+            </a:pPr>
+            <a:r>
+              <a:rPr lang="en-US" sz="2000" dirty="0">
+                <a:solidFill>
+                  <a:srgbClr val="F4E6C1"/>
+                </a:solidFill>
+                <a:latin typeface="Georgia" pitchFamily="34" charset="0"/>
+                <a:ea typeface="Georgia" pitchFamily="34" charset="-122"/>
+                <a:cs typeface="Georgia" pitchFamily="34" charset="-120"/>
+              </a:rPr>
+              <a:t>Vs today: lecture/Wikipedia vs a playable two-minute ride. We beat the lecture. We did not beat a finished cultural AAA horse game — and we should not pretend we did.</a:t>
             </a:r>
             <a:endParaRPr lang="en-US" sz="2000" dirty="0"/>
           </a:p>
@@ -2193,6 +2261,243 @@
 <file path=ppt/slides/slide11.xml><?xml version="1.0" encoding="utf-8"?>
 <p:sld xmlns:a="http://schemas.openxmlformats.org/drawingml/2006/main" xmlns:r="http://schemas.openxmlformats.org/officeDocument/2006/relationships" xmlns:p="http://schemas.openxmlformats.org/presentationml/2006/main">
   <p:cSld name="Slide 11">
+    <p:bg>
+      <p:bgPr>
+        <a:solidFill>
+          <a:srgbClr val="1A1208"/>
+        </a:solidFill>
+      </p:bgPr>
+    </p:bg>
+    <p:spTree>
+      <p:nvGrpSpPr>
+        <p:cNvPr id="1" name=""/>
+        <p:cNvGrpSpPr/>
+        <p:nvPr/>
+      </p:nvGrpSpPr>
+      <p:grpSpPr>
+        <a:xfrm>
+          <a:off x="0" y="0"/>
+          <a:ext cx="0" cy="0"/>
+          <a:chOff x="0" y="0"/>
+          <a:chExt cx="0" cy="0"/>
+        </a:xfrm>
+      </p:grpSpPr>
+      <p:sp>
+        <p:nvSpPr>
+          <p:cNvPr id="2" name="Text 0"/>
+          <p:cNvSpPr/>
+          <p:nvPr/>
+        </p:nvSpPr>
+        <p:spPr>
+          <a:xfrm>
+            <a:off x="548640" y="256032"/>
+            <a:ext cx="11064240" cy="777240"/>
+          </a:xfrm>
+          <a:prstGeom prst="rect">
+            <a:avLst/>
+          </a:prstGeom>
+          <a:noFill/>
+          <a:ln/>
+        </p:spPr>
+        <p:txBody>
+          <a:bodyPr wrap="square" rtlCol="0" anchor="ctr"/>
+          <a:lstStyle/>
+          <a:p>
+            <a:pPr indent="0" marL="0">
+              <a:buNone/>
+            </a:pPr>
+            <a:r>
+              <a:rPr lang="en-US" sz="3600" b="1" dirty="0">
+                <a:solidFill>
+                  <a:srgbClr val="E8C64A"/>
+                </a:solidFill>
+                <a:latin typeface="Georgia" pitchFamily="34" charset="0"/>
+                <a:ea typeface="Georgia" pitchFamily="34" charset="-122"/>
+                <a:cs typeface="Georgia" pitchFamily="34" charset="-120"/>
+              </a:rPr>
+              <a:t>What to judge</a:t>
+            </a:r>
+            <a:endParaRPr lang="en-US" sz="3600" dirty="0"/>
+          </a:p>
+        </p:txBody>
+      </p:sp>
+      <p:sp>
+        <p:nvSpPr>
+          <p:cNvPr id="3" name="Text 1"/>
+          <p:cNvSpPr/>
+          <p:nvPr/>
+        </p:nvSpPr>
+        <p:spPr>
+          <a:xfrm>
+            <a:off x="548640" y="1024128"/>
+            <a:ext cx="11064240" cy="457200"/>
+          </a:xfrm>
+          <a:prstGeom prst="rect">
+            <a:avLst/>
+          </a:prstGeom>
+          <a:noFill/>
+          <a:ln/>
+        </p:spPr>
+        <p:txBody>
+          <a:bodyPr wrap="square" rtlCol="0" anchor="ctr"/>
+          <a:lstStyle/>
+          <a:p>
+            <a:pPr indent="0" marL="0">
+              <a:buNone/>
+            </a:pPr>
+            <a:r>
+              <a:rPr lang="en-US" sz="1800" i="1" dirty="0">
+                <a:solidFill>
+                  <a:srgbClr val="C9A227"/>
+                </a:solidFill>
+                <a:latin typeface="Georgia" pitchFamily="34" charset="0"/>
+                <a:ea typeface="Georgia" pitchFamily="34" charset="-122"/>
+                <a:cs typeface="Georgia" pitchFamily="34" charset="-120"/>
+              </a:rPr>
+              <a:t>Priority when features conflict</a:t>
+            </a:r>
+            <a:endParaRPr lang="en-US" sz="1800" dirty="0"/>
+          </a:p>
+        </p:txBody>
+      </p:sp>
+      <p:sp>
+        <p:nvSpPr>
+          <p:cNvPr id="4" name="Text 2"/>
+          <p:cNvSpPr/>
+          <p:nvPr/>
+        </p:nvSpPr>
+        <p:spPr>
+          <a:xfrm>
+            <a:off x="640080" y="1645920"/>
+            <a:ext cx="10972800" cy="4663440"/>
+          </a:xfrm>
+          <a:prstGeom prst="rect">
+            <a:avLst/>
+          </a:prstGeom>
+          <a:noFill/>
+          <a:ln/>
+        </p:spPr>
+        <p:txBody>
+          <a:bodyPr wrap="square" rtlCol="0" anchor="ctr"/>
+          <a:lstStyle/>
+          <a:p>
+            <a:pPr marL="342900" indent="-342900">
+              <a:spcAft>
+                <a:spcPts val="1000"/>
+              </a:spcAft>
+              <a:buSzPct val="100000"/>
+              <a:buChar char="•"/>
+            </a:pPr>
+            <a:r>
+              <a:rPr lang="en-US" sz="2000" dirty="0">
+                <a:solidFill>
+                  <a:srgbClr val="F4E6C1"/>
+                </a:solidFill>
+                <a:latin typeface="Georgia" pitchFamily="34" charset="0"/>
+                <a:ea typeface="Georgia" pitchFamily="34" charset="-122"/>
+                <a:cs typeface="Georgia" pitchFamily="34" charset="-120"/>
+              </a:rPr>
+              <a:t>Cultural authenticity first</a:t>
+            </a:r>
+            <a:endParaRPr lang="en-US" sz="2000" dirty="0"/>
+          </a:p>
+          <a:p>
+            <a:pPr marL="342900" indent="-342900">
+              <a:spcAft>
+                <a:spcPts val="1000"/>
+              </a:spcAft>
+              <a:buSzPct val="100000"/>
+              <a:buChar char="•"/>
+            </a:pPr>
+            <a:r>
+              <a:rPr lang="en-US" sz="2000" dirty="0">
+                <a:solidFill>
+                  <a:srgbClr val="F4E6C1"/>
+                </a:solidFill>
+                <a:latin typeface="Georgia" pitchFamily="34" charset="0"/>
+                <a:ea typeface="Georgia" pitchFamily="34" charset="-122"/>
+                <a:cs typeface="Georgia" pitchFamily="34" charset="-120"/>
+              </a:rPr>
+              <a:t>Then a playable combat and AI loop</a:t>
+            </a:r>
+            <a:endParaRPr lang="en-US" sz="2000" dirty="0"/>
+          </a:p>
+          <a:p>
+            <a:pPr marL="342900" indent="-342900">
+              <a:spcAft>
+                <a:spcPts val="1000"/>
+              </a:spcAft>
+              <a:buSzPct val="100000"/>
+              <a:buChar char="•"/>
+            </a:pPr>
+            <a:r>
+              <a:rPr lang="en-US" sz="2000" dirty="0">
+                <a:solidFill>
+                  <a:srgbClr val="F4E6C1"/>
+                </a:solidFill>
+                <a:latin typeface="Georgia" pitchFamily="34" charset="0"/>
+                <a:ea typeface="Georgia" pitchFamily="34" charset="-122"/>
+                <a:cs typeface="Georgia" pitchFamily="34" charset="-120"/>
+              </a:rPr>
+              <a:t>Then generative / branching narrative</a:t>
+            </a:r>
+            <a:endParaRPr lang="en-US" sz="2000" dirty="0"/>
+          </a:p>
+          <a:p>
+            <a:pPr marL="342900" indent="-342900">
+              <a:spcAft>
+                <a:spcPts val="1000"/>
+              </a:spcAft>
+              <a:buSzPct val="100000"/>
+              <a:buChar char="•"/>
+            </a:pPr>
+            <a:r>
+              <a:rPr lang="en-US" sz="2000" dirty="0">
+                <a:solidFill>
+                  <a:srgbClr val="F4E6C1"/>
+                </a:solidFill>
+                <a:latin typeface="Georgia" pitchFamily="34" charset="0"/>
+                <a:ea typeface="Georgia" pitchFamily="34" charset="-122"/>
+                <a:cs typeface="Georgia" pitchFamily="34" charset="-120"/>
+              </a:rPr>
+              <a:t>Then polish</a:t>
+            </a:r>
+            <a:endParaRPr lang="en-US" sz="2000" dirty="0"/>
+          </a:p>
+          <a:p>
+            <a:pPr marL="342900" indent="-342900">
+              <a:spcAft>
+                <a:spcPts val="1000"/>
+              </a:spcAft>
+              <a:buSzPct val="100000"/>
+              <a:buChar char="•"/>
+            </a:pPr>
+            <a:r>
+              <a:rPr lang="en-US" sz="2000" dirty="0">
+                <a:solidFill>
+                  <a:srgbClr val="F4E6C1"/>
+                </a:solidFill>
+                <a:latin typeface="Georgia" pitchFamily="34" charset="0"/>
+                <a:ea typeface="Georgia" pitchFamily="34" charset="-122"/>
+                <a:cs typeface="Georgia" pitchFamily="34" charset="-120"/>
+              </a:rPr>
+              <a:t>This prototype proves the loop in a few minutes of play</a:t>
+            </a:r>
+            <a:endParaRPr lang="en-US" sz="2000" dirty="0"/>
+          </a:p>
+        </p:txBody>
+      </p:sp>
+    </p:spTree>
+  </p:cSld>
+  <p:clrMapOvr>
+    <a:masterClrMapping/>
+  </p:clrMapOvr>
+</p:sld>
+</file>
+
+<file path=ppt/slides/slide12.xml><?xml version="1.0" encoding="utf-8"?>
+<p:sld xmlns:a="http://schemas.openxmlformats.org/drawingml/2006/main" xmlns:r="http://schemas.openxmlformats.org/officeDocument/2006/relationships" xmlns:p="http://schemas.openxmlformats.org/presentationml/2006/main">
+  <p:cSld name="Slide 12">
     <p:bg>
       <p:bgPr>
         <a:solidFill>
